--- a/1-Wahrscheinlichkeitsräume/1-Abbildungen/wtfi-1-wahrscheinlichkeitstheorie.pptx
+++ b/1-Wahrscheinlichkeitsräume/1-Abbildungen/wtfi-1-wahrscheinlichkeitstheorie.pptx
@@ -243,7 +243,7 @@
           <a:p>
             <a:fld id="{2B41A6A7-50F4-463B-910E-CFAB06BEAEBD}" type="datetimeFigureOut">
               <a:rPr lang="de-DE" smtClean="0"/>
-              <a:t>13.10.2026</a:t>
+              <a:t>22.10.2026</a:t>
             </a:fld>
             <a:endParaRPr lang="de-DE"/>
           </a:p>
@@ -413,7 +413,7 @@
           <a:p>
             <a:fld id="{2B41A6A7-50F4-463B-910E-CFAB06BEAEBD}" type="datetimeFigureOut">
               <a:rPr lang="de-DE" smtClean="0"/>
-              <a:t>13.10.2026</a:t>
+              <a:t>22.10.2026</a:t>
             </a:fld>
             <a:endParaRPr lang="de-DE"/>
           </a:p>
@@ -593,7 +593,7 @@
           <a:p>
             <a:fld id="{2B41A6A7-50F4-463B-910E-CFAB06BEAEBD}" type="datetimeFigureOut">
               <a:rPr lang="de-DE" smtClean="0"/>
-              <a:t>13.10.2026</a:t>
+              <a:t>22.10.2026</a:t>
             </a:fld>
             <a:endParaRPr lang="de-DE"/>
           </a:p>
@@ -763,7 +763,7 @@
           <a:p>
             <a:fld id="{2B41A6A7-50F4-463B-910E-CFAB06BEAEBD}" type="datetimeFigureOut">
               <a:rPr lang="de-DE" smtClean="0"/>
-              <a:t>13.10.2026</a:t>
+              <a:t>22.10.2026</a:t>
             </a:fld>
             <a:endParaRPr lang="de-DE"/>
           </a:p>
@@ -1007,7 +1007,7 @@
           <a:p>
             <a:fld id="{2B41A6A7-50F4-463B-910E-CFAB06BEAEBD}" type="datetimeFigureOut">
               <a:rPr lang="de-DE" smtClean="0"/>
-              <a:t>13.10.2026</a:t>
+              <a:t>22.10.2026</a:t>
             </a:fld>
             <a:endParaRPr lang="de-DE"/>
           </a:p>
@@ -1239,7 +1239,7 @@
           <a:p>
             <a:fld id="{2B41A6A7-50F4-463B-910E-CFAB06BEAEBD}" type="datetimeFigureOut">
               <a:rPr lang="de-DE" smtClean="0"/>
-              <a:t>13.10.2026</a:t>
+              <a:t>22.10.2026</a:t>
             </a:fld>
             <a:endParaRPr lang="de-DE"/>
           </a:p>
@@ -1606,7 +1606,7 @@
           <a:p>
             <a:fld id="{2B41A6A7-50F4-463B-910E-CFAB06BEAEBD}" type="datetimeFigureOut">
               <a:rPr lang="de-DE" smtClean="0"/>
-              <a:t>13.10.2026</a:t>
+              <a:t>22.10.2026</a:t>
             </a:fld>
             <a:endParaRPr lang="de-DE"/>
           </a:p>
@@ -1724,7 +1724,7 @@
           <a:p>
             <a:fld id="{2B41A6A7-50F4-463B-910E-CFAB06BEAEBD}" type="datetimeFigureOut">
               <a:rPr lang="de-DE" smtClean="0"/>
-              <a:t>13.10.2026</a:t>
+              <a:t>22.10.2026</a:t>
             </a:fld>
             <a:endParaRPr lang="de-DE"/>
           </a:p>
@@ -1819,7 +1819,7 @@
           <a:p>
             <a:fld id="{2B41A6A7-50F4-463B-910E-CFAB06BEAEBD}" type="datetimeFigureOut">
               <a:rPr lang="de-DE" smtClean="0"/>
-              <a:t>13.10.2026</a:t>
+              <a:t>22.10.2026</a:t>
             </a:fld>
             <a:endParaRPr lang="de-DE"/>
           </a:p>
@@ -2096,7 +2096,7 @@
           <a:p>
             <a:fld id="{2B41A6A7-50F4-463B-910E-CFAB06BEAEBD}" type="datetimeFigureOut">
               <a:rPr lang="de-DE" smtClean="0"/>
-              <a:t>13.10.2026</a:t>
+              <a:t>22.10.2026</a:t>
             </a:fld>
             <a:endParaRPr lang="de-DE"/>
           </a:p>
@@ -2353,7 +2353,7 @@
           <a:p>
             <a:fld id="{2B41A6A7-50F4-463B-910E-CFAB06BEAEBD}" type="datetimeFigureOut">
               <a:rPr lang="de-DE" smtClean="0"/>
-              <a:t>13.10.2026</a:t>
+              <a:t>22.10.2026</a:t>
             </a:fld>
             <a:endParaRPr lang="de-DE"/>
           </a:p>
@@ -2566,7 +2566,7 @@
           <a:p>
             <a:fld id="{2B41A6A7-50F4-463B-910E-CFAB06BEAEBD}" type="datetimeFigureOut">
               <a:rPr lang="de-DE" smtClean="0"/>
-              <a:t>13.10.2026</a:t>
+              <a:t>22.10.2026</a:t>
             </a:fld>
             <a:endParaRPr lang="de-DE"/>
           </a:p>
@@ -2973,10 +2973,10 @@
       </p:grpSpPr>
       <p:grpSp>
         <p:nvGrpSpPr>
-          <p:cNvPr id="46" name="Group 45">
+          <p:cNvPr id="8" name="Group 7">
             <a:extLst>
               <a:ext uri="{FF2B5EF4-FFF2-40B4-BE49-F238E27FC236}">
-                <a16:creationId xmlns:a16="http://schemas.microsoft.com/office/drawing/2014/main" id="{42741DFF-ACCE-4FBA-8982-9D347163C27B}"/>
+                <a16:creationId xmlns:a16="http://schemas.microsoft.com/office/drawing/2014/main" id="{89F40F4F-055A-400D-A8D2-DF2C06AF5180}"/>
               </a:ext>
             </a:extLst>
           </p:cNvPr>
@@ -2984,295 +2984,19 @@
           <p:nvPr/>
         </p:nvGrpSpPr>
         <p:grpSpPr>
-          <a:xfrm>
-            <a:off x="25584" y="279880"/>
-            <a:ext cx="7809659" cy="5356301"/>
-            <a:chOff x="637563" y="829153"/>
-            <a:chExt cx="7809659" cy="5356301"/>
+          <a:xfrm flipH="1">
+            <a:off x="1752966" y="694962"/>
+            <a:ext cx="4472082" cy="4472081"/>
+            <a:chOff x="2608226" y="1345579"/>
+            <a:chExt cx="3788509" cy="3788508"/>
           </a:xfrm>
         </p:grpSpPr>
-        <p:grpSp>
-          <p:nvGrpSpPr>
-            <p:cNvPr id="8" name="Group 7">
+        <p:sp>
+          <p:nvSpPr>
+            <p:cNvPr id="4" name="Oval 3">
               <a:extLst>
                 <a:ext uri="{FF2B5EF4-FFF2-40B4-BE49-F238E27FC236}">
-                  <a16:creationId xmlns:a16="http://schemas.microsoft.com/office/drawing/2014/main" id="{89F40F4F-055A-400D-A8D2-DF2C06AF5180}"/>
-                </a:ext>
-              </a:extLst>
-            </p:cNvPr>
-            <p:cNvGrpSpPr/>
-            <p:nvPr/>
-          </p:nvGrpSpPr>
-          <p:grpSpPr>
-            <a:xfrm>
-              <a:off x="2364945" y="1244235"/>
-              <a:ext cx="4472082" cy="4472081"/>
-              <a:chOff x="2608226" y="1345579"/>
-              <a:chExt cx="3788509" cy="3788508"/>
-            </a:xfrm>
-          </p:grpSpPr>
-          <p:sp>
-            <p:nvSpPr>
-              <p:cNvPr id="4" name="Oval 3">
-                <a:extLst>
-                  <a:ext uri="{FF2B5EF4-FFF2-40B4-BE49-F238E27FC236}">
-                    <a16:creationId xmlns:a16="http://schemas.microsoft.com/office/drawing/2014/main" id="{560AE87E-4453-4F60-ABAF-84596E066A02}"/>
-                  </a:ext>
-                </a:extLst>
-              </p:cNvPr>
-              <p:cNvSpPr/>
-              <p:nvPr/>
-            </p:nvSpPr>
-            <p:spPr>
-              <a:xfrm>
-                <a:off x="2608226" y="1345579"/>
-                <a:ext cx="3788508" cy="3788508"/>
-              </a:xfrm>
-              <a:prstGeom prst="ellipse">
-                <a:avLst/>
-              </a:prstGeom>
-              <a:solidFill>
-                <a:schemeClr val="bg1"/>
-              </a:solidFill>
-              <a:ln>
-                <a:solidFill>
-                  <a:schemeClr val="tx1"/>
-                </a:solidFill>
-              </a:ln>
-            </p:spPr>
-            <p:style>
-              <a:lnRef idx="2">
-                <a:schemeClr val="accent1">
-                  <a:shade val="50000"/>
-                </a:schemeClr>
-              </a:lnRef>
-              <a:fillRef idx="1">
-                <a:schemeClr val="accent1"/>
-              </a:fillRef>
-              <a:effectRef idx="0">
-                <a:schemeClr val="accent1"/>
-              </a:effectRef>
-              <a:fontRef idx="minor">
-                <a:schemeClr val="lt1"/>
-              </a:fontRef>
-            </p:style>
-            <p:txBody>
-              <a:bodyPr rtlCol="0" anchor="ctr"/>
-              <a:lstStyle/>
-              <a:p>
-                <a:pPr algn="ctr"/>
-                <a:endParaRPr lang="de-DE"/>
-              </a:p>
-            </p:txBody>
-          </p:sp>
-          <p:sp>
-            <p:nvSpPr>
-              <p:cNvPr id="5" name="Rectangle 4">
-                <a:extLst>
-                  <a:ext uri="{FF2B5EF4-FFF2-40B4-BE49-F238E27FC236}">
-                    <a16:creationId xmlns:a16="http://schemas.microsoft.com/office/drawing/2014/main" id="{84698CF7-637D-4FF3-AFCA-11C3A0126CCA}"/>
-                  </a:ext>
-                </a:extLst>
-              </p:cNvPr>
-              <p:cNvSpPr/>
-              <p:nvPr/>
-            </p:nvSpPr>
-            <p:spPr>
-              <a:xfrm>
-                <a:off x="2608226" y="1784343"/>
-                <a:ext cx="3788509" cy="2910980"/>
-              </a:xfrm>
-              <a:prstGeom prst="rect">
-                <a:avLst/>
-              </a:prstGeom>
-              <a:solidFill>
-                <a:schemeClr val="bg1"/>
-              </a:solidFill>
-              <a:ln>
-                <a:solidFill>
-                  <a:schemeClr val="bg1"/>
-                </a:solidFill>
-              </a:ln>
-            </p:spPr>
-            <p:style>
-              <a:lnRef idx="2">
-                <a:schemeClr val="accent1">
-                  <a:shade val="50000"/>
-                </a:schemeClr>
-              </a:lnRef>
-              <a:fillRef idx="1">
-                <a:schemeClr val="accent1"/>
-              </a:fillRef>
-              <a:effectRef idx="0">
-                <a:schemeClr val="accent1"/>
-              </a:effectRef>
-              <a:fontRef idx="minor">
-                <a:schemeClr val="lt1"/>
-              </a:fontRef>
-            </p:style>
-            <p:txBody>
-              <a:bodyPr rtlCol="0" anchor="ctr"/>
-              <a:lstStyle/>
-              <a:p>
-                <a:pPr algn="ctr"/>
-                <a:endParaRPr lang="de-DE"/>
-              </a:p>
-            </p:txBody>
-          </p:sp>
-          <p:sp>
-            <p:nvSpPr>
-              <p:cNvPr id="6" name="Right Triangle 5">
-                <a:extLst>
-                  <a:ext uri="{FF2B5EF4-FFF2-40B4-BE49-F238E27FC236}">
-                    <a16:creationId xmlns:a16="http://schemas.microsoft.com/office/drawing/2014/main" id="{046DA639-B137-42BC-82EA-D64380FF0D5D}"/>
-                  </a:ext>
-                </a:extLst>
-              </p:cNvPr>
-              <p:cNvSpPr/>
-              <p:nvPr/>
-            </p:nvSpPr>
-            <p:spPr>
-              <a:xfrm>
-                <a:off x="3196205" y="1687870"/>
-                <a:ext cx="192946" cy="192946"/>
-              </a:xfrm>
-              <a:prstGeom prst="rtTriangle">
-                <a:avLst/>
-              </a:prstGeom>
-              <a:solidFill>
-                <a:schemeClr val="tx1"/>
-              </a:solidFill>
-              <a:ln>
-                <a:solidFill>
-                  <a:schemeClr val="bg1"/>
-                </a:solidFill>
-              </a:ln>
-            </p:spPr>
-            <p:style>
-              <a:lnRef idx="2">
-                <a:schemeClr val="accent1">
-                  <a:shade val="50000"/>
-                </a:schemeClr>
-              </a:lnRef>
-              <a:fillRef idx="1">
-                <a:schemeClr val="accent1"/>
-              </a:fillRef>
-              <a:effectRef idx="0">
-                <a:schemeClr val="accent1"/>
-              </a:effectRef>
-              <a:fontRef idx="minor">
-                <a:schemeClr val="lt1"/>
-              </a:fontRef>
-            </p:style>
-            <p:txBody>
-              <a:bodyPr rtlCol="0" anchor="ctr"/>
-              <a:lstStyle/>
-              <a:p>
-                <a:pPr algn="ctr"/>
-                <a:endParaRPr lang="de-DE"/>
-              </a:p>
-            </p:txBody>
-          </p:sp>
-          <p:sp>
-            <p:nvSpPr>
-              <p:cNvPr id="7" name="Right Triangle 6">
-                <a:extLst>
-                  <a:ext uri="{FF2B5EF4-FFF2-40B4-BE49-F238E27FC236}">
-                    <a16:creationId xmlns:a16="http://schemas.microsoft.com/office/drawing/2014/main" id="{D4C23F88-B8B9-4DB3-B819-144890DA27AE}"/>
-                  </a:ext>
-                </a:extLst>
-              </p:cNvPr>
-              <p:cNvSpPr/>
-              <p:nvPr/>
-            </p:nvSpPr>
-            <p:spPr>
-              <a:xfrm rot="10800000">
-                <a:off x="5610413" y="4608508"/>
-                <a:ext cx="192946" cy="192946"/>
-              </a:xfrm>
-              <a:prstGeom prst="rtTriangle">
-                <a:avLst/>
-              </a:prstGeom>
-              <a:solidFill>
-                <a:schemeClr val="tx1"/>
-              </a:solidFill>
-              <a:ln>
-                <a:solidFill>
-                  <a:schemeClr val="bg1"/>
-                </a:solidFill>
-              </a:ln>
-            </p:spPr>
-            <p:style>
-              <a:lnRef idx="2">
-                <a:schemeClr val="accent1">
-                  <a:shade val="50000"/>
-                </a:schemeClr>
-              </a:lnRef>
-              <a:fillRef idx="1">
-                <a:schemeClr val="accent1"/>
-              </a:fillRef>
-              <a:effectRef idx="0">
-                <a:schemeClr val="accent1"/>
-              </a:effectRef>
-              <a:fontRef idx="minor">
-                <a:schemeClr val="lt1"/>
-              </a:fontRef>
-            </p:style>
-            <p:txBody>
-              <a:bodyPr rtlCol="0" anchor="ctr"/>
-              <a:lstStyle/>
-              <a:p>
-                <a:pPr algn="ctr"/>
-                <a:endParaRPr lang="de-DE"/>
-              </a:p>
-            </p:txBody>
-          </p:sp>
-        </p:grpSp>
-        <p:sp>
-          <p:nvSpPr>
-            <p:cNvPr id="10" name="TextBox 9">
-              <a:extLst>
-                <a:ext uri="{FF2B5EF4-FFF2-40B4-BE49-F238E27FC236}">
-                  <a16:creationId xmlns:a16="http://schemas.microsoft.com/office/drawing/2014/main" id="{13305106-1DC6-47FB-8419-153ABFB09606}"/>
-                </a:ext>
-              </a:extLst>
-            </p:cNvPr>
-            <p:cNvSpPr txBox="1"/>
-            <p:nvPr/>
-          </p:nvSpPr>
-          <p:spPr>
-            <a:xfrm>
-              <a:off x="5783827" y="1896515"/>
-              <a:ext cx="2101857" cy="553998"/>
-            </a:xfrm>
-            <a:prstGeom prst="rect">
-              <a:avLst/>
-            </a:prstGeom>
-            <a:noFill/>
-          </p:spPr>
-          <p:txBody>
-            <a:bodyPr wrap="none" rtlCol="0">
-              <a:spAutoFit/>
-            </a:bodyPr>
-            <a:lstStyle/>
-            <a:p>
-              <a:r>
-                <a:rPr lang="de-DE" sz="3000" dirty="0">
-                  <a:latin typeface="CMU Sans Serif" panose="02000603000000000000" pitchFamily="2" charset="0"/>
-                  <a:ea typeface="CMU Sans Serif" panose="02000603000000000000" pitchFamily="2" charset="0"/>
-                  <a:cs typeface="CMU Sans Serif" panose="02000603000000000000" pitchFamily="2" charset="0"/>
-                </a:rPr>
-                <a:t>Wirklichkeit</a:t>
-              </a:r>
-            </a:p>
-          </p:txBody>
-        </p:sp>
-        <p:sp>
-          <p:nvSpPr>
-            <p:cNvPr id="12" name="Cloud 11">
-              <a:extLst>
-                <a:ext uri="{FF2B5EF4-FFF2-40B4-BE49-F238E27FC236}">
-                  <a16:creationId xmlns:a16="http://schemas.microsoft.com/office/drawing/2014/main" id="{6FC897C2-999C-4CA0-88AA-F2E0AD9A04E0}"/>
+                  <a16:creationId xmlns:a16="http://schemas.microsoft.com/office/drawing/2014/main" id="{560AE87E-4453-4F60-ABAF-84596E066A02}"/>
                 </a:ext>
               </a:extLst>
             </p:cNvPr>
@@ -3281,30 +3005,20 @@
           </p:nvSpPr>
           <p:spPr>
             <a:xfrm>
-              <a:off x="637563" y="2148353"/>
-              <a:ext cx="3278722" cy="2890841"/>
+              <a:off x="2608226" y="1345579"/>
+              <a:ext cx="3788508" cy="3788508"/>
             </a:xfrm>
-            <a:prstGeom prst="cloud">
+            <a:prstGeom prst="ellipse">
               <a:avLst/>
             </a:prstGeom>
-            <a:blipFill>
-              <a:blip r:embed="rId2">
-                <a:duotone>
-                  <a:schemeClr val="accent3">
-                    <a:shade val="45000"/>
-                    <a:satMod val="135000"/>
-                  </a:schemeClr>
-                  <a:prstClr val="white"/>
-                </a:duotone>
-              </a:blip>
-              <a:tile tx="0" ty="0" sx="100000" sy="100000" flip="none" algn="tl"/>
-            </a:blipFill>
+            <a:solidFill>
+              <a:schemeClr val="bg1"/>
+            </a:solidFill>
             <a:ln>
-              <a:noFill/>
+              <a:solidFill>
+                <a:schemeClr val="tx1"/>
+              </a:solidFill>
             </a:ln>
-            <a:effectLst>
-              <a:softEdge rad="127000"/>
-            </a:effectLst>
           </p:spPr>
           <p:style>
             <a:lnRef idx="2">
@@ -3327,1093 +3041,16 @@
             <a:lstStyle/>
             <a:p>
               <a:pPr algn="ctr"/>
-              <a:endParaRPr lang="LID4096" dirty="0">
-                <a:latin typeface="CMU Sans Serif" panose="02000603000000000000" pitchFamily="2" charset="0"/>
-                <a:ea typeface="CMU Sans Serif" panose="02000603000000000000" pitchFamily="2" charset="0"/>
-                <a:cs typeface="CMU Sans Serif" panose="02000603000000000000" pitchFamily="2" charset="0"/>
-              </a:endParaRPr>
+              <a:endParaRPr lang="de-DE"/>
             </a:p>
           </p:txBody>
         </p:sp>
         <p:sp>
           <p:nvSpPr>
-            <p:cNvPr id="13" name="TextBox 12">
+            <p:cNvPr id="5" name="Rectangle 4">
               <a:extLst>
                 <a:ext uri="{FF2B5EF4-FFF2-40B4-BE49-F238E27FC236}">
-                  <a16:creationId xmlns:a16="http://schemas.microsoft.com/office/drawing/2014/main" id="{20C00251-5025-4EF5-8399-8B2EBFFC145E}"/>
-                </a:ext>
-              </a:extLst>
-            </p:cNvPr>
-            <p:cNvSpPr txBox="1"/>
-            <p:nvPr/>
-          </p:nvSpPr>
-          <p:spPr>
-            <a:xfrm>
-              <a:off x="990646" y="2627044"/>
-              <a:ext cx="2722220" cy="369332"/>
-            </a:xfrm>
-            <a:prstGeom prst="rect">
-              <a:avLst/>
-            </a:prstGeom>
-            <a:noFill/>
-          </p:spPr>
-          <p:txBody>
-            <a:bodyPr wrap="none" rtlCol="0">
-              <a:spAutoFit/>
-            </a:bodyPr>
-            <a:lstStyle/>
-            <a:p>
-              <a:r>
-                <a:rPr lang="de-DE" dirty="0">
-                  <a:latin typeface="CMU Sans Serif" panose="02000603000000000000" pitchFamily="50" charset="0"/>
-                  <a:ea typeface="CMU Sans Serif" panose="02000603000000000000" pitchFamily="50" charset="0"/>
-                  <a:cs typeface="CMU Sans Serif" panose="02000603000000000000" pitchFamily="50" charset="0"/>
-                </a:rPr>
-                <a:t>Wahrscheinlichkeitstheorie</a:t>
-              </a:r>
-            </a:p>
-          </p:txBody>
-        </p:sp>
-        <p:sp>
-          <p:nvSpPr>
-            <p:cNvPr id="14" name="TextBox 13">
-              <a:extLst>
-                <a:ext uri="{FF2B5EF4-FFF2-40B4-BE49-F238E27FC236}">
-                  <a16:creationId xmlns:a16="http://schemas.microsoft.com/office/drawing/2014/main" id="{BEAD075E-5354-4ABE-AB85-D5B071585A0C}"/>
-                </a:ext>
-              </a:extLst>
-            </p:cNvPr>
-            <p:cNvSpPr txBox="1"/>
-            <p:nvPr/>
-          </p:nvSpPr>
-          <p:spPr>
-            <a:xfrm>
-              <a:off x="1230295" y="3032866"/>
-              <a:ext cx="2242922" cy="338554"/>
-            </a:xfrm>
-            <a:prstGeom prst="rect">
-              <a:avLst/>
-            </a:prstGeom>
-            <a:noFill/>
-          </p:spPr>
-          <p:txBody>
-            <a:bodyPr wrap="none" rtlCol="0">
-              <a:spAutoFit/>
-            </a:bodyPr>
-            <a:lstStyle/>
-            <a:p>
-              <a:r>
-                <a:rPr lang="de-DE" sz="1600" dirty="0">
-                  <a:solidFill>
-                    <a:schemeClr val="bg1">
-                      <a:lumMod val="50000"/>
-                    </a:schemeClr>
-                  </a:solidFill>
-                  <a:latin typeface="CMU Sans Serif" panose="02000603000000000000" pitchFamily="2" charset="0"/>
-                  <a:ea typeface="CMU Sans Serif" panose="02000603000000000000" pitchFamily="2" charset="0"/>
-                  <a:cs typeface="CMU Sans Serif" panose="02000603000000000000" pitchFamily="2" charset="0"/>
-                </a:rPr>
-                <a:t>Probabilistisches Modell</a:t>
-              </a:r>
-            </a:p>
-          </p:txBody>
-        </p:sp>
-        <p:sp>
-          <p:nvSpPr>
-            <p:cNvPr id="15" name="TextBox 14">
-              <a:extLst>
-                <a:ext uri="{FF2B5EF4-FFF2-40B4-BE49-F238E27FC236}">
-                  <a16:creationId xmlns:a16="http://schemas.microsoft.com/office/drawing/2014/main" id="{A518EE49-40B5-478E-B3A3-52AB3593BDA3}"/>
-                </a:ext>
-              </a:extLst>
-            </p:cNvPr>
-            <p:cNvSpPr txBox="1"/>
-            <p:nvPr/>
-          </p:nvSpPr>
-          <p:spPr>
-            <a:xfrm>
-              <a:off x="1029118" y="3782954"/>
-              <a:ext cx="2645276" cy="338554"/>
-            </a:xfrm>
-            <a:prstGeom prst="rect">
-              <a:avLst/>
-            </a:prstGeom>
-            <a:noFill/>
-          </p:spPr>
-          <p:txBody>
-            <a:bodyPr wrap="none" rtlCol="0">
-              <a:spAutoFit/>
-            </a:bodyPr>
-            <a:lstStyle/>
-            <a:p>
-              <a:r>
-                <a:rPr lang="de-DE" sz="1600" dirty="0">
-                  <a:solidFill>
-                    <a:schemeClr val="bg1">
-                      <a:lumMod val="50000"/>
-                    </a:schemeClr>
-                  </a:solidFill>
-                  <a:latin typeface="CMU Sans Serif" panose="02000603000000000000" pitchFamily="2" charset="0"/>
-                  <a:ea typeface="CMU Sans Serif" panose="02000603000000000000" pitchFamily="2" charset="0"/>
-                  <a:cs typeface="CMU Sans Serif" panose="02000603000000000000" pitchFamily="2" charset="0"/>
-                </a:rPr>
-                <a:t>Wahrscheinlichkeitsrechnung</a:t>
-              </a:r>
-            </a:p>
-          </p:txBody>
-        </p:sp>
-        <mc:AlternateContent xmlns:mc="http://schemas.openxmlformats.org/markup-compatibility/2006" xmlns:a14="http://schemas.microsoft.com/office/drawing/2010/main">
-          <mc:Choice Requires="a14">
-            <p:sp>
-              <p:nvSpPr>
-                <p:cNvPr id="16" name="TextBox 15">
-                  <a:extLst>
-                    <a:ext uri="{FF2B5EF4-FFF2-40B4-BE49-F238E27FC236}">
-                      <a16:creationId xmlns:a16="http://schemas.microsoft.com/office/drawing/2014/main" id="{ECFAEFDA-1490-4232-9697-373920959759}"/>
-                    </a:ext>
-                  </a:extLst>
-                </p:cNvPr>
-                <p:cNvSpPr txBox="1"/>
-                <p:nvPr/>
-              </p:nvSpPr>
-              <p:spPr>
-                <a:xfrm>
-                  <a:off x="1398803" y="3407910"/>
-                  <a:ext cx="1875257" cy="338554"/>
-                </a:xfrm>
-                <a:prstGeom prst="rect">
-                  <a:avLst/>
-                </a:prstGeom>
-                <a:noFill/>
-              </p:spPr>
-              <p:txBody>
-                <a:bodyPr wrap="none" rtlCol="0">
-                  <a:spAutoFit/>
-                </a:bodyPr>
-                <a:lstStyle/>
-                <a:p>
-                  <a:pPr/>
-                  <a14:m>
-                    <m:oMathPara xmlns:m="http://schemas.openxmlformats.org/officeDocument/2006/math">
-                      <m:oMath>
-                        <m:d>
-                          <m:dPr>
-                            <m:ctrlPr>
-                              <a:rPr lang="de-DE" sz="1600">
-                                <a:solidFill>
-                                  <a:schemeClr val="bg1">
-                                    <a:lumMod val="50000"/>
-                                  </a:schemeClr>
-                                </a:solidFill>
-                                <a:latin typeface="Cambria Math" panose="02040503050406030204" pitchFamily="18" charset="0"/>
-                              </a:rPr>
-                            </m:ctrlPr>
-                          </m:dPr>
-                          <m:e>
-                            <m:r>
-                              <m:rPr>
-                                <m:sty m:val="p"/>
-                              </m:rPr>
-                              <a:rPr lang="de-DE" sz="1600">
-                                <a:solidFill>
-                                  <a:schemeClr val="bg1">
-                                    <a:lumMod val="50000"/>
-                                  </a:schemeClr>
-                                </a:solidFill>
-                                <a:latin typeface="Cambria Math" panose="02040503050406030204" pitchFamily="18" charset="0"/>
-                              </a:rPr>
-                              <m:t>Ω</m:t>
-                            </m:r>
-                            <m:r>
-                              <a:rPr lang="de-DE" sz="1600" i="1">
-                                <a:solidFill>
-                                  <a:schemeClr val="bg1">
-                                    <a:lumMod val="50000"/>
-                                  </a:schemeClr>
-                                </a:solidFill>
-                                <a:latin typeface="Cambria Math" panose="02040503050406030204" pitchFamily="18" charset="0"/>
-                              </a:rPr>
-                              <m:t>, </m:t>
-                            </m:r>
-                            <m:r>
-                              <a:rPr lang="de-DE" sz="1600" i="1">
-                                <a:solidFill>
-                                  <a:schemeClr val="bg1">
-                                    <a:lumMod val="50000"/>
-                                  </a:schemeClr>
-                                </a:solidFill>
-                                <a:latin typeface="Cambria Math" panose="02040503050406030204" pitchFamily="18" charset="0"/>
-                              </a:rPr>
-                              <m:t>𝒜</m:t>
-                            </m:r>
-                            <m:r>
-                              <a:rPr lang="de-DE" sz="1600" i="1">
-                                <a:solidFill>
-                                  <a:schemeClr val="bg1">
-                                    <a:lumMod val="50000"/>
-                                  </a:schemeClr>
-                                </a:solidFill>
-                                <a:latin typeface="Cambria Math" panose="02040503050406030204" pitchFamily="18" charset="0"/>
-                              </a:rPr>
-                              <m:t>, </m:t>
-                            </m:r>
-                            <m:r>
-                              <a:rPr lang="de-DE" sz="1600" i="1">
-                                <a:solidFill>
-                                  <a:schemeClr val="bg1">
-                                    <a:lumMod val="50000"/>
-                                  </a:schemeClr>
-                                </a:solidFill>
-                                <a:latin typeface="Cambria Math" panose="02040503050406030204" pitchFamily="18" charset="0"/>
-                              </a:rPr>
-                              <m:t>ℙ</m:t>
-                            </m:r>
-                          </m:e>
-                        </m:d>
-                        <m:r>
-                          <a:rPr lang="de-DE" sz="1600" i="1">
-                            <a:solidFill>
-                              <a:schemeClr val="bg1">
-                                <a:lumMod val="50000"/>
-                              </a:schemeClr>
-                            </a:solidFill>
-                            <a:latin typeface="Cambria Math" panose="02040503050406030204" pitchFamily="18" charset="0"/>
-                          </a:rPr>
-                          <m:t>, </m:t>
-                        </m:r>
-                        <m:r>
-                          <a:rPr lang="de-DE" sz="1600" i="1">
-                            <a:solidFill>
-                              <a:schemeClr val="bg1">
-                                <a:lumMod val="50000"/>
-                              </a:schemeClr>
-                            </a:solidFill>
-                            <a:latin typeface="Cambria Math" panose="02040503050406030204" pitchFamily="18" charset="0"/>
-                          </a:rPr>
-                          <m:t>𝜉</m:t>
-                        </m:r>
-                        <m:r>
-                          <a:rPr lang="de-DE" sz="1600" i="1">
-                            <a:solidFill>
-                              <a:schemeClr val="bg1">
-                                <a:lumMod val="50000"/>
-                              </a:schemeClr>
-                            </a:solidFill>
-                            <a:latin typeface="Cambria Math" panose="02040503050406030204" pitchFamily="18" charset="0"/>
-                          </a:rPr>
-                          <m:t>:</m:t>
-                        </m:r>
-                        <m:r>
-                          <m:rPr>
-                            <m:sty m:val="p"/>
-                          </m:rPr>
-                          <a:rPr lang="de-DE" sz="1600">
-                            <a:solidFill>
-                              <a:schemeClr val="bg1">
-                                <a:lumMod val="50000"/>
-                              </a:schemeClr>
-                            </a:solidFill>
-                            <a:latin typeface="Cambria Math" panose="02040503050406030204" pitchFamily="18" charset="0"/>
-                          </a:rPr>
-                          <m:t>Ω</m:t>
-                        </m:r>
-                        <m:r>
-                          <a:rPr lang="de-DE" sz="1600" i="1">
-                            <a:solidFill>
-                              <a:schemeClr val="bg1">
-                                <a:lumMod val="50000"/>
-                              </a:schemeClr>
-                            </a:solidFill>
-                            <a:latin typeface="Cambria Math" panose="02040503050406030204" pitchFamily="18" charset="0"/>
-                          </a:rPr>
-                          <m:t>→</m:t>
-                        </m:r>
-                        <m:r>
-                          <a:rPr lang="de-DE" sz="1600" i="1">
-                            <a:solidFill>
-                              <a:schemeClr val="bg1">
-                                <a:lumMod val="50000"/>
-                              </a:schemeClr>
-                            </a:solidFill>
-                            <a:latin typeface="Cambria Math" panose="02040503050406030204" pitchFamily="18" charset="0"/>
-                          </a:rPr>
-                          <m:t>ℝ</m:t>
-                        </m:r>
-                      </m:oMath>
-                    </m:oMathPara>
-                  </a14:m>
-                  <a:endParaRPr lang="de-DE" sz="1600" dirty="0">
-                    <a:solidFill>
-                      <a:schemeClr val="bg1">
-                        <a:lumMod val="50000"/>
-                      </a:schemeClr>
-                    </a:solidFill>
-                  </a:endParaRPr>
-                </a:p>
-              </p:txBody>
-            </p:sp>
-          </mc:Choice>
-          <mc:Fallback xmlns="">
-            <p:sp>
-              <p:nvSpPr>
-                <p:cNvPr id="16" name="TextBox 15">
-                  <a:extLst>
-                    <a:ext uri="{FF2B5EF4-FFF2-40B4-BE49-F238E27FC236}">
-                      <a16:creationId xmlns:a16="http://schemas.microsoft.com/office/drawing/2014/main" id="{ECFAEFDA-1490-4232-9697-373920959759}"/>
-                    </a:ext>
-                  </a:extLst>
-                </p:cNvPr>
-                <p:cNvSpPr txBox="1">
-                  <a:spLocks noRot="1" noChangeAspect="1" noMove="1" noResize="1" noEditPoints="1" noAdjustHandles="1" noChangeArrowheads="1" noChangeShapeType="1" noTextEdit="1"/>
-                </p:cNvSpPr>
-                <p:nvPr/>
-              </p:nvSpPr>
-              <p:spPr>
-                <a:xfrm>
-                  <a:off x="1398803" y="3407910"/>
-                  <a:ext cx="1875257" cy="338554"/>
-                </a:xfrm>
-                <a:prstGeom prst="rect">
-                  <a:avLst/>
-                </a:prstGeom>
-                <a:blipFill>
-                  <a:blip r:embed="rId3"/>
-                  <a:stretch>
-                    <a:fillRect b="-10909"/>
-                  </a:stretch>
-                </a:blipFill>
-              </p:spPr>
-              <p:txBody>
-                <a:bodyPr/>
-                <a:lstStyle/>
-                <a:p>
-                  <a:r>
-                    <a:rPr lang="de-DE">
-                      <a:noFill/>
-                    </a:rPr>
-                    <a:t> </a:t>
-                  </a:r>
-                </a:p>
-              </p:txBody>
-            </p:sp>
-          </mc:Fallback>
-        </mc:AlternateContent>
-        <mc:AlternateContent xmlns:mc="http://schemas.openxmlformats.org/markup-compatibility/2006" xmlns:a14="http://schemas.microsoft.com/office/drawing/2010/main">
-          <mc:Choice Requires="a14">
-            <p:sp>
-              <p:nvSpPr>
-                <p:cNvPr id="17" name="TextBox 16">
-                  <a:extLst>
-                    <a:ext uri="{FF2B5EF4-FFF2-40B4-BE49-F238E27FC236}">
-                      <a16:creationId xmlns:a16="http://schemas.microsoft.com/office/drawing/2014/main" id="{06A93C44-D71F-4A32-926F-C18F1F158287}"/>
-                    </a:ext>
-                  </a:extLst>
-                </p:cNvPr>
-                <p:cNvSpPr txBox="1"/>
-                <p:nvPr/>
-              </p:nvSpPr>
-              <p:spPr>
-                <a:xfrm>
-                  <a:off x="1362607" y="4157997"/>
-                  <a:ext cx="1930913" cy="364780"/>
-                </a:xfrm>
-                <a:prstGeom prst="rect">
-                  <a:avLst/>
-                </a:prstGeom>
-                <a:noFill/>
-              </p:spPr>
-              <p:txBody>
-                <a:bodyPr wrap="none" rtlCol="0">
-                  <a:spAutoFit/>
-                </a:bodyPr>
-                <a:lstStyle/>
-                <a:p>
-                  <a:pPr/>
-                  <a14:m>
-                    <m:oMathPara xmlns:m="http://schemas.openxmlformats.org/officeDocument/2006/math">
-                      <m:oMath>
-                        <m:sSub>
-                          <m:sSubPr>
-                            <m:ctrlPr>
-                              <a:rPr lang="de-DE" sz="1600" i="1">
-                                <a:solidFill>
-                                  <a:schemeClr val="bg1">
-                                    <a:lumMod val="50000"/>
-                                  </a:schemeClr>
-                                </a:solidFill>
-                                <a:latin typeface="Cambria Math" panose="02040503050406030204" pitchFamily="18" charset="0"/>
-                              </a:rPr>
-                            </m:ctrlPr>
-                          </m:sSubPr>
-                          <m:e>
-                            <m:r>
-                              <a:rPr lang="de-DE" sz="1600" i="1">
-                                <a:solidFill>
-                                  <a:schemeClr val="bg1">
-                                    <a:lumMod val="50000"/>
-                                  </a:schemeClr>
-                                </a:solidFill>
-                                <a:latin typeface="Cambria Math" panose="02040503050406030204" pitchFamily="18" charset="0"/>
-                              </a:rPr>
-                              <m:t>ℙ</m:t>
-                            </m:r>
-                          </m:e>
-                          <m:sub>
-                            <m:r>
-                              <a:rPr lang="de-DE" sz="1600" i="1">
-                                <a:solidFill>
-                                  <a:schemeClr val="bg1">
-                                    <a:lumMod val="50000"/>
-                                  </a:schemeClr>
-                                </a:solidFill>
-                                <a:latin typeface="Cambria Math" panose="02040503050406030204" pitchFamily="18" charset="0"/>
-                              </a:rPr>
-                              <m:t>𝜉</m:t>
-                            </m:r>
-                          </m:sub>
-                        </m:sSub>
-                        <m:d>
-                          <m:dPr>
-                            <m:ctrlPr>
-                              <a:rPr lang="de-DE" sz="1600" i="1">
-                                <a:solidFill>
-                                  <a:schemeClr val="bg1">
-                                    <a:lumMod val="50000"/>
-                                  </a:schemeClr>
-                                </a:solidFill>
-                                <a:latin typeface="Cambria Math" panose="02040503050406030204" pitchFamily="18" charset="0"/>
-                              </a:rPr>
-                            </m:ctrlPr>
-                          </m:dPr>
-                          <m:e>
-                            <m:r>
-                              <a:rPr lang="de-DE" sz="1600" i="1">
-                                <a:solidFill>
-                                  <a:schemeClr val="bg1">
-                                    <a:lumMod val="50000"/>
-                                  </a:schemeClr>
-                                </a:solidFill>
-                                <a:latin typeface="Cambria Math" panose="02040503050406030204" pitchFamily="18" charset="0"/>
-                              </a:rPr>
-                              <m:t>𝑆</m:t>
-                            </m:r>
-                          </m:e>
-                        </m:d>
-                        <m:r>
-                          <a:rPr lang="de-DE" sz="1600" i="1">
-                            <a:solidFill>
-                              <a:schemeClr val="bg1">
-                                <a:lumMod val="50000"/>
-                              </a:schemeClr>
-                            </a:solidFill>
-                            <a:latin typeface="Cambria Math" panose="02040503050406030204" pitchFamily="18" charset="0"/>
-                          </a:rPr>
-                          <m:t>=</m:t>
-                        </m:r>
-                        <m:r>
-                          <a:rPr lang="de-DE" sz="1600" i="1">
-                            <a:solidFill>
-                              <a:schemeClr val="bg1">
-                                <a:lumMod val="50000"/>
-                              </a:schemeClr>
-                            </a:solidFill>
-                            <a:latin typeface="Cambria Math" panose="02040503050406030204" pitchFamily="18" charset="0"/>
-                          </a:rPr>
-                          <m:t>ℙ</m:t>
-                        </m:r>
-                        <m:r>
-                          <a:rPr lang="de-DE" sz="1600" i="1">
-                            <a:solidFill>
-                              <a:schemeClr val="bg1">
-                                <a:lumMod val="50000"/>
-                              </a:schemeClr>
-                            </a:solidFill>
-                            <a:latin typeface="Cambria Math" panose="02040503050406030204" pitchFamily="18" charset="0"/>
-                          </a:rPr>
-                          <m:t>(</m:t>
-                        </m:r>
-                        <m:sSup>
-                          <m:sSupPr>
-                            <m:ctrlPr>
-                              <a:rPr lang="de-DE" sz="1600" i="1">
-                                <a:solidFill>
-                                  <a:schemeClr val="bg1">
-                                    <a:lumMod val="50000"/>
-                                  </a:schemeClr>
-                                </a:solidFill>
-                                <a:latin typeface="Cambria Math" panose="02040503050406030204" pitchFamily="18" charset="0"/>
-                              </a:rPr>
-                            </m:ctrlPr>
-                          </m:sSupPr>
-                          <m:e>
-                            <m:r>
-                              <a:rPr lang="de-DE" sz="1600" i="1">
-                                <a:solidFill>
-                                  <a:schemeClr val="bg1">
-                                    <a:lumMod val="50000"/>
-                                  </a:schemeClr>
-                                </a:solidFill>
-                                <a:latin typeface="Cambria Math" panose="02040503050406030204" pitchFamily="18" charset="0"/>
-                              </a:rPr>
-                              <m:t>𝜉</m:t>
-                            </m:r>
-                          </m:e>
-                          <m:sup>
-                            <m:r>
-                              <a:rPr lang="de-DE" sz="1600" i="1">
-                                <a:solidFill>
-                                  <a:schemeClr val="bg1">
-                                    <a:lumMod val="50000"/>
-                                  </a:schemeClr>
-                                </a:solidFill>
-                                <a:latin typeface="Cambria Math" panose="02040503050406030204" pitchFamily="18" charset="0"/>
-                              </a:rPr>
-                              <m:t>−1</m:t>
-                            </m:r>
-                          </m:sup>
-                        </m:sSup>
-                        <m:r>
-                          <a:rPr lang="de-DE" sz="1600" i="1">
-                            <a:solidFill>
-                              <a:schemeClr val="bg1">
-                                <a:lumMod val="50000"/>
-                              </a:schemeClr>
-                            </a:solidFill>
-                            <a:latin typeface="Cambria Math" panose="02040503050406030204" pitchFamily="18" charset="0"/>
-                          </a:rPr>
-                          <m:t>(</m:t>
-                        </m:r>
-                        <m:r>
-                          <a:rPr lang="de-DE" sz="1600" i="1">
-                            <a:solidFill>
-                              <a:schemeClr val="bg1">
-                                <a:lumMod val="50000"/>
-                              </a:schemeClr>
-                            </a:solidFill>
-                            <a:latin typeface="Cambria Math" panose="02040503050406030204" pitchFamily="18" charset="0"/>
-                          </a:rPr>
-                          <m:t>𝑆</m:t>
-                        </m:r>
-                        <m:r>
-                          <a:rPr lang="de-DE" sz="1600" i="1">
-                            <a:solidFill>
-                              <a:schemeClr val="bg1">
-                                <a:lumMod val="50000"/>
-                              </a:schemeClr>
-                            </a:solidFill>
-                            <a:latin typeface="Cambria Math" panose="02040503050406030204" pitchFamily="18" charset="0"/>
-                          </a:rPr>
-                          <m:t>))</m:t>
-                        </m:r>
-                      </m:oMath>
-                    </m:oMathPara>
-                  </a14:m>
-                  <a:endParaRPr lang="de-DE" sz="1600" dirty="0">
-                    <a:solidFill>
-                      <a:schemeClr val="bg1">
-                        <a:lumMod val="50000"/>
-                      </a:schemeClr>
-                    </a:solidFill>
-                  </a:endParaRPr>
-                </a:p>
-              </p:txBody>
-            </p:sp>
-          </mc:Choice>
-          <mc:Fallback xmlns="">
-            <p:sp>
-              <p:nvSpPr>
-                <p:cNvPr id="17" name="TextBox 16">
-                  <a:extLst>
-                    <a:ext uri="{FF2B5EF4-FFF2-40B4-BE49-F238E27FC236}">
-                      <a16:creationId xmlns:a16="http://schemas.microsoft.com/office/drawing/2014/main" id="{06A93C44-D71F-4A32-926F-C18F1F158287}"/>
-                    </a:ext>
-                  </a:extLst>
-                </p:cNvPr>
-                <p:cNvSpPr txBox="1">
-                  <a:spLocks noRot="1" noChangeAspect="1" noMove="1" noResize="1" noEditPoints="1" noAdjustHandles="1" noChangeArrowheads="1" noChangeShapeType="1" noTextEdit="1"/>
-                </p:cNvSpPr>
-                <p:nvPr/>
-              </p:nvSpPr>
-              <p:spPr>
-                <a:xfrm>
-                  <a:off x="1362607" y="4157997"/>
-                  <a:ext cx="1930913" cy="364780"/>
-                </a:xfrm>
-                <a:prstGeom prst="rect">
-                  <a:avLst/>
-                </a:prstGeom>
-                <a:blipFill>
-                  <a:blip r:embed="rId4"/>
-                  <a:stretch>
-                    <a:fillRect b="-5000"/>
-                  </a:stretch>
-                </a:blipFill>
-              </p:spPr>
-              <p:txBody>
-                <a:bodyPr/>
-                <a:lstStyle/>
-                <a:p>
-                  <a:r>
-                    <a:rPr lang="de-DE">
-                      <a:noFill/>
-                    </a:rPr>
-                    <a:t> </a:t>
-                  </a:r>
-                </a:p>
-              </p:txBody>
-            </p:sp>
-          </mc:Fallback>
-        </mc:AlternateContent>
-        <p:sp>
-          <p:nvSpPr>
-            <p:cNvPr id="18" name="TextBox 17">
-              <a:extLst>
-                <a:ext uri="{FF2B5EF4-FFF2-40B4-BE49-F238E27FC236}">
-                  <a16:creationId xmlns:a16="http://schemas.microsoft.com/office/drawing/2014/main" id="{BE3FFAE8-CE9F-44C9-98F7-502EAAE534B7}"/>
-                </a:ext>
-              </a:extLst>
-            </p:cNvPr>
-            <p:cNvSpPr txBox="1"/>
-            <p:nvPr/>
-          </p:nvSpPr>
-          <p:spPr>
-            <a:xfrm>
-              <a:off x="2650241" y="829153"/>
-              <a:ext cx="3929281" cy="369332"/>
-            </a:xfrm>
-            <a:prstGeom prst="rect">
-              <a:avLst/>
-            </a:prstGeom>
-            <a:noFill/>
-          </p:spPr>
-          <p:txBody>
-            <a:bodyPr wrap="none" rtlCol="0">
-              <a:spAutoFit/>
-            </a:bodyPr>
-            <a:lstStyle/>
-            <a:p>
-              <a:r>
-                <a:rPr lang="de-DE" dirty="0">
-                  <a:latin typeface="CMU Sans Serif" panose="02000603000000000000" pitchFamily="2" charset="0"/>
-                  <a:ea typeface="CMU Sans Serif" panose="02000603000000000000" pitchFamily="2" charset="0"/>
-                  <a:cs typeface="CMU Sans Serif" panose="02000603000000000000" pitchFamily="2" charset="0"/>
-                </a:rPr>
-                <a:t>Repräsentation zentraler Eigenschaften</a:t>
-              </a:r>
-            </a:p>
-          </p:txBody>
-        </p:sp>
-        <p:sp>
-          <p:nvSpPr>
-            <p:cNvPr id="19" name="TextBox 18">
-              <a:extLst>
-                <a:ext uri="{FF2B5EF4-FFF2-40B4-BE49-F238E27FC236}">
-                  <a16:creationId xmlns:a16="http://schemas.microsoft.com/office/drawing/2014/main" id="{074E93DD-5B71-40FF-B9D4-3FC68E89DFF2}"/>
-                </a:ext>
-              </a:extLst>
-            </p:cNvPr>
-            <p:cNvSpPr txBox="1"/>
-            <p:nvPr/>
-          </p:nvSpPr>
-          <p:spPr>
-            <a:xfrm>
-              <a:off x="3904590" y="1434998"/>
-              <a:ext cx="1420582" cy="369332"/>
-            </a:xfrm>
-            <a:prstGeom prst="rect">
-              <a:avLst/>
-            </a:prstGeom>
-            <a:noFill/>
-          </p:spPr>
-          <p:txBody>
-            <a:bodyPr wrap="none" rtlCol="0">
-              <a:spAutoFit/>
-            </a:bodyPr>
-            <a:lstStyle/>
-            <a:p>
-              <a:r>
-                <a:rPr lang="de-DE" dirty="0">
-                  <a:latin typeface="CMU Sans Serif" panose="02000603000000000000" pitchFamily="2" charset="0"/>
-                  <a:ea typeface="CMU Sans Serif" panose="02000603000000000000" pitchFamily="2" charset="0"/>
-                  <a:cs typeface="CMU Sans Serif" panose="02000603000000000000" pitchFamily="2" charset="0"/>
-                </a:rPr>
-                <a:t>Modellierung</a:t>
-              </a:r>
-            </a:p>
-          </p:txBody>
-        </p:sp>
-        <p:sp>
-          <p:nvSpPr>
-            <p:cNvPr id="20" name="TextBox 19">
-              <a:extLst>
-                <a:ext uri="{FF2B5EF4-FFF2-40B4-BE49-F238E27FC236}">
-                  <a16:creationId xmlns:a16="http://schemas.microsoft.com/office/drawing/2014/main" id="{2F69F9A2-AF6B-4647-9D4D-F1D8EFF90738}"/>
-                </a:ext>
-              </a:extLst>
-            </p:cNvPr>
-            <p:cNvSpPr txBox="1"/>
-            <p:nvPr/>
-          </p:nvSpPr>
-          <p:spPr>
-            <a:xfrm>
-              <a:off x="3931040" y="5139000"/>
-              <a:ext cx="1367682" cy="369332"/>
-            </a:xfrm>
-            <a:prstGeom prst="rect">
-              <a:avLst/>
-            </a:prstGeom>
-            <a:noFill/>
-          </p:spPr>
-          <p:txBody>
-            <a:bodyPr wrap="none" rtlCol="0">
-              <a:spAutoFit/>
-            </a:bodyPr>
-            <a:lstStyle/>
-            <a:p>
-              <a:r>
-                <a:rPr lang="de-DE" dirty="0">
-                  <a:latin typeface="CMU Sans Serif" panose="02000603000000000000" pitchFamily="2" charset="0"/>
-                  <a:ea typeface="CMU Sans Serif" panose="02000603000000000000" pitchFamily="2" charset="0"/>
-                  <a:cs typeface="CMU Sans Serif" panose="02000603000000000000" pitchFamily="2" charset="0"/>
-                </a:rPr>
-                <a:t>Vorhersagen</a:t>
-              </a:r>
-            </a:p>
-          </p:txBody>
-        </p:sp>
-        <p:sp>
-          <p:nvSpPr>
-            <p:cNvPr id="21" name="TextBox 20">
-              <a:extLst>
-                <a:ext uri="{FF2B5EF4-FFF2-40B4-BE49-F238E27FC236}">
-                  <a16:creationId xmlns:a16="http://schemas.microsoft.com/office/drawing/2014/main" id="{B5B26F24-F1ED-43CF-AA2A-FAA82841D015}"/>
-                </a:ext>
-              </a:extLst>
-            </p:cNvPr>
-            <p:cNvSpPr txBox="1"/>
-            <p:nvPr/>
-          </p:nvSpPr>
-          <p:spPr>
-            <a:xfrm>
-              <a:off x="2950002" y="5816122"/>
-              <a:ext cx="3329758" cy="369332"/>
-            </a:xfrm>
-            <a:prstGeom prst="rect">
-              <a:avLst/>
-            </a:prstGeom>
-            <a:noFill/>
-          </p:spPr>
-          <p:txBody>
-            <a:bodyPr wrap="none" rtlCol="0">
-              <a:spAutoFit/>
-            </a:bodyPr>
-            <a:lstStyle/>
-            <a:p>
-              <a:r>
-                <a:rPr lang="de-DE" dirty="0">
-                  <a:latin typeface="CMU Sans Serif" panose="02000603000000000000" pitchFamily="2" charset="0"/>
-                  <a:ea typeface="CMU Sans Serif" panose="02000603000000000000" pitchFamily="2" charset="0"/>
-                  <a:cs typeface="CMU Sans Serif" panose="02000603000000000000" pitchFamily="2" charset="0"/>
-                </a:rPr>
-                <a:t>Quantifizierung von Unsicherheit</a:t>
-              </a:r>
-            </a:p>
-          </p:txBody>
-        </p:sp>
-        <p:sp>
-          <p:nvSpPr>
-            <p:cNvPr id="9" name="TextBox 8">
-              <a:extLst>
-                <a:ext uri="{FF2B5EF4-FFF2-40B4-BE49-F238E27FC236}">
-                  <a16:creationId xmlns:a16="http://schemas.microsoft.com/office/drawing/2014/main" id="{350C3C8A-6E76-491D-A5B0-066F6F5F67A9}"/>
-                </a:ext>
-              </a:extLst>
-            </p:cNvPr>
-            <p:cNvSpPr txBox="1"/>
-            <p:nvPr/>
-          </p:nvSpPr>
-          <p:spPr>
-            <a:xfrm>
-              <a:off x="1643577" y="1921751"/>
-              <a:ext cx="1266693" cy="553998"/>
-            </a:xfrm>
-            <a:prstGeom prst="rect">
-              <a:avLst/>
-            </a:prstGeom>
-            <a:noFill/>
-          </p:spPr>
-          <p:txBody>
-            <a:bodyPr wrap="none" rtlCol="0">
-              <a:spAutoFit/>
-            </a:bodyPr>
-            <a:lstStyle/>
-            <a:p>
-              <a:r>
-                <a:rPr lang="de-DE" sz="3000" dirty="0">
-                  <a:latin typeface="CMU Sans Serif" panose="02000603000000000000" pitchFamily="2" charset="0"/>
-                  <a:ea typeface="CMU Sans Serif" panose="02000603000000000000" pitchFamily="2" charset="0"/>
-                  <a:cs typeface="CMU Sans Serif" panose="02000603000000000000" pitchFamily="2" charset="0"/>
-                </a:rPr>
-                <a:t>Modell</a:t>
-              </a:r>
-            </a:p>
-          </p:txBody>
-        </p:sp>
-        <p:grpSp>
-          <p:nvGrpSpPr>
-            <p:cNvPr id="44" name="Group 43">
-              <a:extLst>
-                <a:ext uri="{FF2B5EF4-FFF2-40B4-BE49-F238E27FC236}">
-                  <a16:creationId xmlns:a16="http://schemas.microsoft.com/office/drawing/2014/main" id="{0B87DA3F-0A37-4972-8B84-AD3118DFAF8A}"/>
-                </a:ext>
-              </a:extLst>
-            </p:cNvPr>
-            <p:cNvGrpSpPr/>
-            <p:nvPr/>
-          </p:nvGrpSpPr>
-          <p:grpSpPr>
-            <a:xfrm>
-              <a:off x="5711357" y="2401709"/>
-              <a:ext cx="2188022" cy="2435230"/>
-              <a:chOff x="5959540" y="2616031"/>
-              <a:chExt cx="2553083" cy="2841536"/>
-            </a:xfrm>
-          </p:grpSpPr>
-          <p:pic>
-            <p:nvPicPr>
-              <p:cNvPr id="23" name="Picture 22" descr="A picture containing remote, controller, indoor, game&#10;&#10;Description automatically generated">
-                <a:extLst>
-                  <a:ext uri="{FF2B5EF4-FFF2-40B4-BE49-F238E27FC236}">
-                    <a16:creationId xmlns:a16="http://schemas.microsoft.com/office/drawing/2014/main" id="{4799A0FE-DBF3-44FC-B547-A1A8BF0954AF}"/>
-                  </a:ext>
-                </a:extLst>
-              </p:cNvPr>
-              <p:cNvPicPr>
-                <a:picLocks noChangeAspect="1"/>
-              </p:cNvPicPr>
-              <p:nvPr/>
-            </p:nvPicPr>
-            <p:blipFill>
-              <a:blip r:embed="rId5">
-                <a:grayscl/>
-                <a:extLst>
-                  <a:ext uri="{28A0092B-C50C-407E-A947-70E740481C1C}">
-                    <a14:useLocalDpi xmlns:a14="http://schemas.microsoft.com/office/drawing/2010/main" val="0"/>
-                  </a:ext>
-                </a:extLst>
-              </a:blip>
-              <a:stretch>
-                <a:fillRect/>
-              </a:stretch>
-            </p:blipFill>
-            <p:spPr>
-              <a:xfrm>
-                <a:off x="6263373" y="2866929"/>
-                <a:ext cx="777344" cy="586024"/>
-              </a:xfrm>
-              <a:prstGeom prst="rect">
-                <a:avLst/>
-              </a:prstGeom>
-            </p:spPr>
-          </p:pic>
-          <p:pic>
-            <p:nvPicPr>
-              <p:cNvPr id="34" name="Picture 33" descr="A person working on a computer&#10;&#10;Description automatically generated with low confidence">
-                <a:extLst>
-                  <a:ext uri="{FF2B5EF4-FFF2-40B4-BE49-F238E27FC236}">
-                    <a16:creationId xmlns:a16="http://schemas.microsoft.com/office/drawing/2014/main" id="{2DDB4FBC-E6FF-45DA-825C-E36189F7ABF2}"/>
-                  </a:ext>
-                </a:extLst>
-              </p:cNvPr>
-              <p:cNvPicPr>
-                <a:picLocks noChangeAspect="1"/>
-              </p:cNvPicPr>
-              <p:nvPr/>
-            </p:nvPicPr>
-            <p:blipFill>
-              <a:blip r:embed="rId6">
-                <a:grayscl/>
-                <a:extLst>
-                  <a:ext uri="{28A0092B-C50C-407E-A947-70E740481C1C}">
-                    <a14:useLocalDpi xmlns:a14="http://schemas.microsoft.com/office/drawing/2010/main" val="0"/>
-                  </a:ext>
-                </a:extLst>
-              </a:blip>
-              <a:stretch>
-                <a:fillRect/>
-              </a:stretch>
-            </p:blipFill>
-            <p:spPr>
-              <a:xfrm>
-                <a:off x="5964503" y="3537055"/>
-                <a:ext cx="1231535" cy="684589"/>
-              </a:xfrm>
-              <a:prstGeom prst="rect">
-                <a:avLst/>
-              </a:prstGeom>
-            </p:spPr>
-          </p:pic>
-          <p:pic>
-            <p:nvPicPr>
-              <p:cNvPr id="37" name="Picture 36" descr="A close up of a roulette wheel&#10;&#10;Description automatically generated with medium confidence">
-                <a:extLst>
-                  <a:ext uri="{FF2B5EF4-FFF2-40B4-BE49-F238E27FC236}">
-                    <a16:creationId xmlns:a16="http://schemas.microsoft.com/office/drawing/2014/main" id="{D7607054-71A3-46D2-9A07-46F468FE2002}"/>
-                  </a:ext>
-                </a:extLst>
-              </p:cNvPr>
-              <p:cNvPicPr>
-                <a:picLocks noChangeAspect="1"/>
-              </p:cNvPicPr>
-              <p:nvPr/>
-            </p:nvPicPr>
-            <p:blipFill>
-              <a:blip r:embed="rId7">
-                <a:grayscl/>
-                <a:extLst>
-                  <a:ext uri="{28A0092B-C50C-407E-A947-70E740481C1C}">
-                    <a14:useLocalDpi xmlns:a14="http://schemas.microsoft.com/office/drawing/2010/main" val="0"/>
-                  </a:ext>
-                </a:extLst>
-              </a:blip>
-              <a:stretch>
-                <a:fillRect/>
-              </a:stretch>
-            </p:blipFill>
-            <p:spPr>
-              <a:xfrm>
-                <a:off x="7401873" y="3825064"/>
-                <a:ext cx="921192" cy="614128"/>
-              </a:xfrm>
-              <a:prstGeom prst="rect">
-                <a:avLst/>
-              </a:prstGeom>
-              <a:ln>
-                <a:noFill/>
-              </a:ln>
-              <a:effectLst>
-                <a:softEdge rad="112500"/>
-              </a:effectLst>
-            </p:spPr>
-          </p:pic>
-          <p:pic>
-            <p:nvPicPr>
-              <p:cNvPr id="39" name="Picture 38" descr="Text&#10;&#10;Description automatically generated with low confidence">
-                <a:extLst>
-                  <a:ext uri="{FF2B5EF4-FFF2-40B4-BE49-F238E27FC236}">
-                    <a16:creationId xmlns:a16="http://schemas.microsoft.com/office/drawing/2014/main" id="{3B5CC7A7-FC1A-436E-B73A-54753402B87F}"/>
-                  </a:ext>
-                </a:extLst>
-              </p:cNvPr>
-              <p:cNvPicPr>
-                <a:picLocks noChangeAspect="1"/>
-              </p:cNvPicPr>
-              <p:nvPr/>
-            </p:nvPicPr>
-            <p:blipFill>
-              <a:blip r:embed="rId8">
-                <a:grayscl/>
-                <a:extLst>
-                  <a:ext uri="{28A0092B-C50C-407E-A947-70E740481C1C}">
-                    <a14:useLocalDpi xmlns:a14="http://schemas.microsoft.com/office/drawing/2010/main" val="0"/>
-                  </a:ext>
-                </a:extLst>
-              </a:blip>
-              <a:stretch>
-                <a:fillRect/>
-              </a:stretch>
-            </p:blipFill>
-            <p:spPr>
-              <a:xfrm>
-                <a:off x="7620797" y="2616031"/>
-                <a:ext cx="842997" cy="1103965"/>
-              </a:xfrm>
-              <a:prstGeom prst="rect">
-                <a:avLst/>
-              </a:prstGeom>
-            </p:spPr>
-          </p:pic>
-          <p:pic>
-            <p:nvPicPr>
-              <p:cNvPr id="41" name="Picture 40" descr="A group of people sitting in chairs&#10;&#10;Description automatically generated with low confidence">
-                <a:extLst>
-                  <a:ext uri="{FF2B5EF4-FFF2-40B4-BE49-F238E27FC236}">
-                    <a16:creationId xmlns:a16="http://schemas.microsoft.com/office/drawing/2014/main" id="{6B9CBA47-8A45-408D-8C24-7B1D73F535B0}"/>
-                  </a:ext>
-                </a:extLst>
-              </p:cNvPr>
-              <p:cNvPicPr>
-                <a:picLocks noChangeAspect="1"/>
-              </p:cNvPicPr>
-              <p:nvPr/>
-            </p:nvPicPr>
-            <p:blipFill>
-              <a:blip r:embed="rId9">
-                <a:grayscl/>
-                <a:extLst>
-                  <a:ext uri="{28A0092B-C50C-407E-A947-70E740481C1C}">
-                    <a14:useLocalDpi xmlns:a14="http://schemas.microsoft.com/office/drawing/2010/main" val="0"/>
-                  </a:ext>
-                </a:extLst>
-              </a:blip>
-              <a:stretch>
-                <a:fillRect/>
-              </a:stretch>
-            </p:blipFill>
-            <p:spPr>
-              <a:xfrm>
-                <a:off x="5959540" y="4538998"/>
-                <a:ext cx="2553083" cy="918569"/>
-              </a:xfrm>
-              <a:prstGeom prst="rect">
-                <a:avLst/>
-              </a:prstGeom>
-            </p:spPr>
-          </p:pic>
-          <p:pic>
-            <p:nvPicPr>
-              <p:cNvPr id="26" name="Picture 25" descr="A picture containing logo&#10;&#10;Description automatically generated">
-                <a:extLst>
-                  <a:ext uri="{FF2B5EF4-FFF2-40B4-BE49-F238E27FC236}">
-                    <a16:creationId xmlns:a16="http://schemas.microsoft.com/office/drawing/2014/main" id="{AD6370E4-D950-44DE-ACAE-5858E1218183}"/>
-                  </a:ext>
-                </a:extLst>
-              </p:cNvPr>
-              <p:cNvPicPr>
-                <a:picLocks noChangeAspect="1"/>
-              </p:cNvPicPr>
-              <p:nvPr/>
-            </p:nvPicPr>
-            <p:blipFill>
-              <a:blip r:embed="rId10">
-                <a:grayscl/>
-                <a:extLst>
-                  <a:ext uri="{28A0092B-C50C-407E-A947-70E740481C1C}">
-                    <a14:useLocalDpi xmlns:a14="http://schemas.microsoft.com/office/drawing/2010/main" val="0"/>
-                  </a:ext>
-                </a:extLst>
-              </a:blip>
-              <a:stretch>
-                <a:fillRect/>
-              </a:stretch>
-            </p:blipFill>
-            <p:spPr>
-              <a:xfrm>
-                <a:off x="7149297" y="3123239"/>
-                <a:ext cx="516850" cy="516850"/>
-              </a:xfrm>
-              <a:prstGeom prst="rect">
-                <a:avLst/>
-              </a:prstGeom>
-            </p:spPr>
-          </p:pic>
-        </p:grpSp>
-        <p:sp>
-          <p:nvSpPr>
-            <p:cNvPr id="42" name="Rectangle 41">
-              <a:extLst>
-                <a:ext uri="{FF2B5EF4-FFF2-40B4-BE49-F238E27FC236}">
-                  <a16:creationId xmlns:a16="http://schemas.microsoft.com/office/drawing/2014/main" id="{0232B15F-3167-4A3B-8ED0-7D7F53A40B37}"/>
+                  <a16:creationId xmlns:a16="http://schemas.microsoft.com/office/drawing/2014/main" id="{84698CF7-637D-4FF3-AFCA-11C3A0126CCA}"/>
                 </a:ext>
               </a:extLst>
             </p:cNvPr>
@@ -4422,16 +3059,14 @@
           </p:nvSpPr>
           <p:spPr>
             <a:xfrm>
-              <a:off x="5673429" y="2401709"/>
-              <a:ext cx="2491217" cy="2594390"/>
+              <a:off x="2608226" y="1784343"/>
+              <a:ext cx="3788509" cy="2910980"/>
             </a:xfrm>
             <a:prstGeom prst="rect">
               <a:avLst/>
             </a:prstGeom>
             <a:solidFill>
-              <a:schemeClr val="bg1">
-                <a:alpha val="80000"/>
-              </a:schemeClr>
+              <a:schemeClr val="bg1"/>
             </a:solidFill>
             <a:ln>
               <a:solidFill>
@@ -4460,159 +3095,1508 @@
             <a:lstStyle/>
             <a:p>
               <a:pPr algn="ctr"/>
-              <a:endParaRPr lang="de-DE" dirty="0"/>
+              <a:endParaRPr lang="de-DE"/>
             </a:p>
           </p:txBody>
         </p:sp>
         <p:sp>
           <p:nvSpPr>
-            <p:cNvPr id="25" name="TextBox 24">
+            <p:cNvPr id="6" name="Right Triangle 5">
               <a:extLst>
                 <a:ext uri="{FF2B5EF4-FFF2-40B4-BE49-F238E27FC236}">
-                  <a16:creationId xmlns:a16="http://schemas.microsoft.com/office/drawing/2014/main" id="{A326C4DA-8239-4EDD-8E73-20E880E6E7F2}"/>
+                  <a16:creationId xmlns:a16="http://schemas.microsoft.com/office/drawing/2014/main" id="{046DA639-B137-42BC-82EA-D64380FF0D5D}"/>
                 </a:ext>
               </a:extLst>
             </p:cNvPr>
-            <p:cNvSpPr txBox="1"/>
+            <p:cNvSpPr/>
             <p:nvPr/>
           </p:nvSpPr>
           <p:spPr>
             <a:xfrm>
-              <a:off x="6048900" y="2616732"/>
-              <a:ext cx="1686679" cy="374461"/>
+              <a:off x="3196205" y="1687870"/>
+              <a:ext cx="192946" cy="192946"/>
             </a:xfrm>
-            <a:prstGeom prst="rect">
+            <a:prstGeom prst="rtTriangle">
               <a:avLst/>
             </a:prstGeom>
-            <a:noFill/>
+            <a:solidFill>
+              <a:schemeClr val="tx1"/>
+            </a:solidFill>
+            <a:ln>
+              <a:solidFill>
+                <a:schemeClr val="bg1"/>
+              </a:solidFill>
+            </a:ln>
           </p:spPr>
+          <p:style>
+            <a:lnRef idx="2">
+              <a:schemeClr val="accent1">
+                <a:shade val="50000"/>
+              </a:schemeClr>
+            </a:lnRef>
+            <a:fillRef idx="1">
+              <a:schemeClr val="accent1"/>
+            </a:fillRef>
+            <a:effectRef idx="0">
+              <a:schemeClr val="accent1"/>
+            </a:effectRef>
+            <a:fontRef idx="minor">
+              <a:schemeClr val="lt1"/>
+            </a:fontRef>
+          </p:style>
           <p:txBody>
-            <a:bodyPr wrap="none" rtlCol="0">
-              <a:spAutoFit/>
-            </a:bodyPr>
+            <a:bodyPr rtlCol="0" anchor="ctr"/>
             <a:lstStyle/>
             <a:p>
-              <a:pPr algn="ctr">
-                <a:lnSpc>
-                  <a:spcPts val="2160"/>
-                </a:lnSpc>
-              </a:pPr>
-              <a:r>
-                <a:rPr lang="de-DE" dirty="0">
-                  <a:latin typeface="CMU Sans Serif" panose="02000603000000000000" pitchFamily="2" charset="0"/>
-                  <a:ea typeface="CMU Sans Serif" panose="02000603000000000000" pitchFamily="2" charset="0"/>
-                  <a:cs typeface="CMU Sans Serif" panose="02000603000000000000" pitchFamily="2" charset="0"/>
-                </a:rPr>
-                <a:t>Zufallsvorgänge</a:t>
-              </a:r>
-              <a:endParaRPr lang="de-DE" sz="1600" dirty="0">
-                <a:solidFill>
-                  <a:srgbClr val="0070C0"/>
-                </a:solidFill>
-                <a:latin typeface="CMU Sans Serif" panose="02000603000000000000" pitchFamily="2" charset="0"/>
-                <a:ea typeface="CMU Sans Serif" panose="02000603000000000000" pitchFamily="2" charset="0"/>
-                <a:cs typeface="CMU Sans Serif" panose="02000603000000000000" pitchFamily="2" charset="0"/>
-              </a:endParaRPr>
+              <a:pPr algn="ctr"/>
+              <a:endParaRPr lang="de-DE"/>
             </a:p>
           </p:txBody>
         </p:sp>
         <p:sp>
           <p:nvSpPr>
-            <p:cNvPr id="43" name="TextBox 42">
+            <p:cNvPr id="7" name="Right Triangle 6">
               <a:extLst>
                 <a:ext uri="{FF2B5EF4-FFF2-40B4-BE49-F238E27FC236}">
-                  <a16:creationId xmlns:a16="http://schemas.microsoft.com/office/drawing/2014/main" id="{D48C25C5-3AE9-4AA2-A1DA-E7AE1D5D9094}"/>
+                  <a16:creationId xmlns:a16="http://schemas.microsoft.com/office/drawing/2014/main" id="{D4C23F88-B8B9-4DB3-B819-144890DA27AE}"/>
                 </a:ext>
               </a:extLst>
             </p:cNvPr>
-            <p:cNvSpPr txBox="1"/>
+            <p:cNvSpPr/>
             <p:nvPr/>
           </p:nvSpPr>
           <p:spPr>
-            <a:xfrm>
-              <a:off x="5447683" y="3134210"/>
-              <a:ext cx="2999539" cy="938719"/>
+            <a:xfrm rot="10800000">
+              <a:off x="5610413" y="4608508"/>
+              <a:ext cx="192946" cy="192946"/>
             </a:xfrm>
-            <a:prstGeom prst="rect">
+            <a:prstGeom prst="rtTriangle">
               <a:avLst/>
             </a:prstGeom>
-            <a:noFill/>
+            <a:solidFill>
+              <a:schemeClr val="tx1"/>
+            </a:solidFill>
+            <a:ln>
+              <a:solidFill>
+                <a:schemeClr val="bg1"/>
+              </a:solidFill>
+            </a:ln>
           </p:spPr>
+          <p:style>
+            <a:lnRef idx="2">
+              <a:schemeClr val="accent1">
+                <a:shade val="50000"/>
+              </a:schemeClr>
+            </a:lnRef>
+            <a:fillRef idx="1">
+              <a:schemeClr val="accent1"/>
+            </a:fillRef>
+            <a:effectRef idx="0">
+              <a:schemeClr val="accent1"/>
+            </a:effectRef>
+            <a:fontRef idx="minor">
+              <a:schemeClr val="lt1"/>
+            </a:fontRef>
+          </p:style>
           <p:txBody>
-            <a:bodyPr wrap="none" rtlCol="0">
-              <a:spAutoFit/>
-            </a:bodyPr>
+            <a:bodyPr rtlCol="0" anchor="ctr"/>
             <a:lstStyle/>
             <a:p>
-              <a:pPr algn="ctr">
-                <a:lnSpc>
-                  <a:spcPts val="2160"/>
-                </a:lnSpc>
-              </a:pPr>
-              <a:r>
-                <a:rPr lang="de-DE" sz="1700" dirty="0">
+              <a:pPr algn="ctr"/>
+              <a:endParaRPr lang="de-DE"/>
+            </a:p>
+          </p:txBody>
+        </p:sp>
+      </p:grpSp>
+      <p:sp>
+        <p:nvSpPr>
+          <p:cNvPr id="10" name="TextBox 9">
+            <a:extLst>
+              <a:ext uri="{FF2B5EF4-FFF2-40B4-BE49-F238E27FC236}">
+                <a16:creationId xmlns:a16="http://schemas.microsoft.com/office/drawing/2014/main" id="{13305106-1DC6-47FB-8419-153ABFB09606}"/>
+              </a:ext>
+            </a:extLst>
+          </p:cNvPr>
+          <p:cNvSpPr txBox="1"/>
+          <p:nvPr/>
+        </p:nvSpPr>
+        <p:spPr>
+          <a:xfrm>
+            <a:off x="968285" y="1347242"/>
+            <a:ext cx="1370312" cy="553998"/>
+          </a:xfrm>
+          <a:prstGeom prst="rect">
+            <a:avLst/>
+          </a:prstGeom>
+          <a:noFill/>
+        </p:spPr>
+        <p:txBody>
+          <a:bodyPr wrap="none" rtlCol="0">
+            <a:spAutoFit/>
+          </a:bodyPr>
+          <a:lstStyle/>
+          <a:p>
+            <a:pPr algn="ctr"/>
+            <a:r>
+              <a:rPr lang="de-DE" sz="3000" dirty="0">
+                <a:latin typeface="CMU Sans Serif" panose="02000603000000000000" pitchFamily="2" charset="0"/>
+                <a:ea typeface="CMU Sans Serif" panose="02000603000000000000" pitchFamily="2" charset="0"/>
+                <a:cs typeface="CMU Sans Serif" panose="02000603000000000000" pitchFamily="2" charset="0"/>
+              </a:rPr>
+              <a:t>Realität</a:t>
+            </a:r>
+          </a:p>
+        </p:txBody>
+      </p:sp>
+      <p:sp>
+        <p:nvSpPr>
+          <p:cNvPr id="12" name="Cloud 11">
+            <a:extLst>
+              <a:ext uri="{FF2B5EF4-FFF2-40B4-BE49-F238E27FC236}">
+                <a16:creationId xmlns:a16="http://schemas.microsoft.com/office/drawing/2014/main" id="{6FC897C2-999C-4CA0-88AA-F2E0AD9A04E0}"/>
+              </a:ext>
+            </a:extLst>
+          </p:cNvPr>
+          <p:cNvSpPr/>
+          <p:nvPr/>
+        </p:nvSpPr>
+        <p:spPr>
+          <a:xfrm>
+            <a:off x="4556521" y="1599080"/>
+            <a:ext cx="3278722" cy="2890841"/>
+          </a:xfrm>
+          <a:prstGeom prst="cloud">
+            <a:avLst/>
+          </a:prstGeom>
+          <a:blipFill>
+            <a:blip r:embed="rId2">
+              <a:duotone>
+                <a:schemeClr val="accent3">
+                  <a:shade val="45000"/>
+                  <a:satMod val="135000"/>
+                </a:schemeClr>
+                <a:prstClr val="white"/>
+              </a:duotone>
+            </a:blip>
+            <a:tile tx="0" ty="0" sx="100000" sy="100000" flip="none" algn="tl"/>
+          </a:blipFill>
+          <a:ln>
+            <a:noFill/>
+          </a:ln>
+          <a:effectLst>
+            <a:softEdge rad="127000"/>
+          </a:effectLst>
+        </p:spPr>
+        <p:style>
+          <a:lnRef idx="2">
+            <a:schemeClr val="accent1">
+              <a:shade val="50000"/>
+            </a:schemeClr>
+          </a:lnRef>
+          <a:fillRef idx="1">
+            <a:schemeClr val="accent1"/>
+          </a:fillRef>
+          <a:effectRef idx="0">
+            <a:schemeClr val="accent1"/>
+          </a:effectRef>
+          <a:fontRef idx="minor">
+            <a:schemeClr val="lt1"/>
+          </a:fontRef>
+        </p:style>
+        <p:txBody>
+          <a:bodyPr rtlCol="0" anchor="ctr"/>
+          <a:lstStyle/>
+          <a:p>
+            <a:pPr algn="ctr"/>
+            <a:endParaRPr lang="LID4096" dirty="0">
+              <a:latin typeface="CMU Sans Serif" panose="02000603000000000000" pitchFamily="2" charset="0"/>
+              <a:ea typeface="CMU Sans Serif" panose="02000603000000000000" pitchFamily="2" charset="0"/>
+              <a:cs typeface="CMU Sans Serif" panose="02000603000000000000" pitchFamily="2" charset="0"/>
+            </a:endParaRPr>
+          </a:p>
+        </p:txBody>
+      </p:sp>
+      <p:sp>
+        <p:nvSpPr>
+          <p:cNvPr id="13" name="TextBox 12">
+            <a:extLst>
+              <a:ext uri="{FF2B5EF4-FFF2-40B4-BE49-F238E27FC236}">
+                <a16:creationId xmlns:a16="http://schemas.microsoft.com/office/drawing/2014/main" id="{20C00251-5025-4EF5-8399-8B2EBFFC145E}"/>
+              </a:ext>
+            </a:extLst>
+          </p:cNvPr>
+          <p:cNvSpPr txBox="1"/>
+          <p:nvPr/>
+        </p:nvSpPr>
+        <p:spPr>
+          <a:xfrm>
+            <a:off x="4759940" y="2038758"/>
+            <a:ext cx="2722220" cy="369332"/>
+          </a:xfrm>
+          <a:prstGeom prst="rect">
+            <a:avLst/>
+          </a:prstGeom>
+          <a:noFill/>
+        </p:spPr>
+        <p:txBody>
+          <a:bodyPr wrap="none" rtlCol="0">
+            <a:spAutoFit/>
+          </a:bodyPr>
+          <a:lstStyle/>
+          <a:p>
+            <a:pPr algn="ctr"/>
+            <a:r>
+              <a:rPr lang="de-DE" dirty="0">
+                <a:latin typeface="CMU Sans Serif" panose="02000603000000000000" pitchFamily="50" charset="0"/>
+                <a:ea typeface="CMU Sans Serif" panose="02000603000000000000" pitchFamily="50" charset="0"/>
+                <a:cs typeface="CMU Sans Serif" panose="02000603000000000000" pitchFamily="50" charset="0"/>
+              </a:rPr>
+              <a:t>Wahrscheinlichkeitstheorie</a:t>
+            </a:r>
+          </a:p>
+        </p:txBody>
+      </p:sp>
+      <p:sp>
+        <p:nvSpPr>
+          <p:cNvPr id="14" name="TextBox 13">
+            <a:extLst>
+              <a:ext uri="{FF2B5EF4-FFF2-40B4-BE49-F238E27FC236}">
+                <a16:creationId xmlns:a16="http://schemas.microsoft.com/office/drawing/2014/main" id="{BEAD075E-5354-4ABE-AB85-D5B071585A0C}"/>
+              </a:ext>
+            </a:extLst>
+          </p:cNvPr>
+          <p:cNvSpPr txBox="1"/>
+          <p:nvPr/>
+        </p:nvSpPr>
+        <p:spPr>
+          <a:xfrm>
+            <a:off x="4999589" y="2444580"/>
+            <a:ext cx="2242922" cy="338554"/>
+          </a:xfrm>
+          <a:prstGeom prst="rect">
+            <a:avLst/>
+          </a:prstGeom>
+          <a:noFill/>
+        </p:spPr>
+        <p:txBody>
+          <a:bodyPr wrap="none" rtlCol="0">
+            <a:spAutoFit/>
+          </a:bodyPr>
+          <a:lstStyle/>
+          <a:p>
+            <a:pPr algn="ctr"/>
+            <a:r>
+              <a:rPr lang="de-DE" sz="1600" dirty="0">
+                <a:solidFill>
+                  <a:schemeClr val="bg1">
+                    <a:lumMod val="50000"/>
+                  </a:schemeClr>
+                </a:solidFill>
+                <a:latin typeface="CMU Sans Serif" panose="02000603000000000000" pitchFamily="2" charset="0"/>
+                <a:ea typeface="CMU Sans Serif" panose="02000603000000000000" pitchFamily="2" charset="0"/>
+                <a:cs typeface="CMU Sans Serif" panose="02000603000000000000" pitchFamily="2" charset="0"/>
+              </a:rPr>
+              <a:t>Probabilistisches Modell</a:t>
+            </a:r>
+          </a:p>
+        </p:txBody>
+      </p:sp>
+      <p:sp>
+        <p:nvSpPr>
+          <p:cNvPr id="15" name="TextBox 14">
+            <a:extLst>
+              <a:ext uri="{FF2B5EF4-FFF2-40B4-BE49-F238E27FC236}">
+                <a16:creationId xmlns:a16="http://schemas.microsoft.com/office/drawing/2014/main" id="{A518EE49-40B5-478E-B3A3-52AB3593BDA3}"/>
+              </a:ext>
+            </a:extLst>
+          </p:cNvPr>
+          <p:cNvSpPr txBox="1"/>
+          <p:nvPr/>
+        </p:nvSpPr>
+        <p:spPr>
+          <a:xfrm>
+            <a:off x="4798412" y="3205774"/>
+            <a:ext cx="2645276" cy="338554"/>
+          </a:xfrm>
+          <a:prstGeom prst="rect">
+            <a:avLst/>
+          </a:prstGeom>
+          <a:noFill/>
+        </p:spPr>
+        <p:txBody>
+          <a:bodyPr wrap="none" rtlCol="0">
+            <a:spAutoFit/>
+          </a:bodyPr>
+          <a:lstStyle/>
+          <a:p>
+            <a:pPr algn="ctr"/>
+            <a:r>
+              <a:rPr lang="de-DE" sz="1600" dirty="0">
+                <a:solidFill>
+                  <a:schemeClr val="bg1">
+                    <a:lumMod val="50000"/>
+                  </a:schemeClr>
+                </a:solidFill>
+                <a:latin typeface="CMU Sans Serif" panose="02000603000000000000" pitchFamily="2" charset="0"/>
+                <a:ea typeface="CMU Sans Serif" panose="02000603000000000000" pitchFamily="2" charset="0"/>
+                <a:cs typeface="CMU Sans Serif" panose="02000603000000000000" pitchFamily="2" charset="0"/>
+              </a:rPr>
+              <a:t>Wahrscheinlichkeitsrechnung</a:t>
+            </a:r>
+          </a:p>
+        </p:txBody>
+      </p:sp>
+      <mc:AlternateContent xmlns:mc="http://schemas.openxmlformats.org/markup-compatibility/2006">
+        <mc:Choice xmlns:a14="http://schemas.microsoft.com/office/drawing/2010/main" Requires="a14">
+          <p:sp>
+            <p:nvSpPr>
+              <p:cNvPr id="16" name="TextBox 15">
+                <a:extLst>
+                  <a:ext uri="{FF2B5EF4-FFF2-40B4-BE49-F238E27FC236}">
+                    <a16:creationId xmlns:a16="http://schemas.microsoft.com/office/drawing/2014/main" id="{ECFAEFDA-1490-4232-9697-373920959759}"/>
+                  </a:ext>
+                </a:extLst>
+              </p:cNvPr>
+              <p:cNvSpPr txBox="1"/>
+              <p:nvPr/>
+            </p:nvSpPr>
+            <p:spPr>
+              <a:xfrm>
+                <a:off x="5183422" y="2830730"/>
+                <a:ext cx="1875257" cy="338554"/>
+              </a:xfrm>
+              <a:prstGeom prst="rect">
+                <a:avLst/>
+              </a:prstGeom>
+              <a:noFill/>
+            </p:spPr>
+            <p:txBody>
+              <a:bodyPr wrap="none" rtlCol="0">
+                <a:spAutoFit/>
+              </a:bodyPr>
+              <a:lstStyle/>
+              <a:p>
+                <a:pPr algn="ctr"/>
+                <a14:m>
+                  <m:oMathPara xmlns:m="http://schemas.openxmlformats.org/officeDocument/2006/math">
+                    <m:oMath>
+                      <m:d>
+                        <m:dPr>
+                          <m:ctrlPr>
+                            <a:rPr lang="de-DE" sz="1600">
+                              <a:solidFill>
+                                <a:schemeClr val="bg1">
+                                  <a:lumMod val="50000"/>
+                                </a:schemeClr>
+                              </a:solidFill>
+                              <a:latin typeface="Cambria Math" panose="02040503050406030204" pitchFamily="18" charset="0"/>
+                            </a:rPr>
+                          </m:ctrlPr>
+                        </m:dPr>
+                        <m:e>
+                          <m:r>
+                            <m:rPr>
+                              <m:sty m:val="p"/>
+                            </m:rPr>
+                            <a:rPr lang="de-DE" sz="1600">
+                              <a:solidFill>
+                                <a:schemeClr val="bg1">
+                                  <a:lumMod val="50000"/>
+                                </a:schemeClr>
+                              </a:solidFill>
+                              <a:latin typeface="Cambria Math" panose="02040503050406030204" pitchFamily="18" charset="0"/>
+                            </a:rPr>
+                            <m:t>Ω</m:t>
+                          </m:r>
+                          <m:r>
+                            <a:rPr lang="de-DE" sz="1600" i="1">
+                              <a:solidFill>
+                                <a:schemeClr val="bg1">
+                                  <a:lumMod val="50000"/>
+                                </a:schemeClr>
+                              </a:solidFill>
+                              <a:latin typeface="Cambria Math" panose="02040503050406030204" pitchFamily="18" charset="0"/>
+                            </a:rPr>
+                            <m:t>, </m:t>
+                          </m:r>
+                          <m:r>
+                            <a:rPr lang="de-DE" sz="1600" i="1">
+                              <a:solidFill>
+                                <a:schemeClr val="bg1">
+                                  <a:lumMod val="50000"/>
+                                </a:schemeClr>
+                              </a:solidFill>
+                              <a:latin typeface="Cambria Math" panose="02040503050406030204" pitchFamily="18" charset="0"/>
+                            </a:rPr>
+                            <m:t>𝒜</m:t>
+                          </m:r>
+                          <m:r>
+                            <a:rPr lang="de-DE" sz="1600" i="1">
+                              <a:solidFill>
+                                <a:schemeClr val="bg1">
+                                  <a:lumMod val="50000"/>
+                                </a:schemeClr>
+                              </a:solidFill>
+                              <a:latin typeface="Cambria Math" panose="02040503050406030204" pitchFamily="18" charset="0"/>
+                            </a:rPr>
+                            <m:t>, </m:t>
+                          </m:r>
+                          <m:r>
+                            <a:rPr lang="de-DE" sz="1600" i="1">
+                              <a:solidFill>
+                                <a:schemeClr val="bg1">
+                                  <a:lumMod val="50000"/>
+                                </a:schemeClr>
+                              </a:solidFill>
+                              <a:latin typeface="Cambria Math" panose="02040503050406030204" pitchFamily="18" charset="0"/>
+                            </a:rPr>
+                            <m:t>ℙ</m:t>
+                          </m:r>
+                        </m:e>
+                      </m:d>
+                      <m:r>
+                        <a:rPr lang="de-DE" sz="1600" i="1">
+                          <a:solidFill>
+                            <a:schemeClr val="bg1">
+                              <a:lumMod val="50000"/>
+                            </a:schemeClr>
+                          </a:solidFill>
+                          <a:latin typeface="Cambria Math" panose="02040503050406030204" pitchFamily="18" charset="0"/>
+                        </a:rPr>
+                        <m:t>, </m:t>
+                      </m:r>
+                      <m:r>
+                        <a:rPr lang="de-DE" sz="1600" i="1">
+                          <a:solidFill>
+                            <a:schemeClr val="bg1">
+                              <a:lumMod val="50000"/>
+                            </a:schemeClr>
+                          </a:solidFill>
+                          <a:latin typeface="Cambria Math" panose="02040503050406030204" pitchFamily="18" charset="0"/>
+                        </a:rPr>
+                        <m:t>𝜉</m:t>
+                      </m:r>
+                      <m:r>
+                        <a:rPr lang="de-DE" sz="1600" i="1">
+                          <a:solidFill>
+                            <a:schemeClr val="bg1">
+                              <a:lumMod val="50000"/>
+                            </a:schemeClr>
+                          </a:solidFill>
+                          <a:latin typeface="Cambria Math" panose="02040503050406030204" pitchFamily="18" charset="0"/>
+                        </a:rPr>
+                        <m:t>:</m:t>
+                      </m:r>
+                      <m:r>
+                        <m:rPr>
+                          <m:sty m:val="p"/>
+                        </m:rPr>
+                        <a:rPr lang="de-DE" sz="1600">
+                          <a:solidFill>
+                            <a:schemeClr val="bg1">
+                              <a:lumMod val="50000"/>
+                            </a:schemeClr>
+                          </a:solidFill>
+                          <a:latin typeface="Cambria Math" panose="02040503050406030204" pitchFamily="18" charset="0"/>
+                        </a:rPr>
+                        <m:t>Ω</m:t>
+                      </m:r>
+                      <m:r>
+                        <a:rPr lang="de-DE" sz="1600" i="1">
+                          <a:solidFill>
+                            <a:schemeClr val="bg1">
+                              <a:lumMod val="50000"/>
+                            </a:schemeClr>
+                          </a:solidFill>
+                          <a:latin typeface="Cambria Math" panose="02040503050406030204" pitchFamily="18" charset="0"/>
+                        </a:rPr>
+                        <m:t>→</m:t>
+                      </m:r>
+                      <m:r>
+                        <a:rPr lang="de-DE" sz="1600" i="1">
+                          <a:solidFill>
+                            <a:schemeClr val="bg1">
+                              <a:lumMod val="50000"/>
+                            </a:schemeClr>
+                          </a:solidFill>
+                          <a:latin typeface="Cambria Math" panose="02040503050406030204" pitchFamily="18" charset="0"/>
+                        </a:rPr>
+                        <m:t>ℝ</m:t>
+                      </m:r>
+                    </m:oMath>
+                  </m:oMathPara>
+                </a14:m>
+                <a:endParaRPr lang="de-DE" sz="1600" dirty="0">
                   <a:solidFill>
                     <a:schemeClr val="bg1">
                       <a:lumMod val="50000"/>
                     </a:schemeClr>
                   </a:solidFill>
-                  <a:latin typeface="CMU Sans Serif" panose="02000603000000000000" pitchFamily="2" charset="0"/>
-                  <a:ea typeface="CMU Sans Serif" panose="02000603000000000000" pitchFamily="2" charset="0"/>
-                  <a:cs typeface="CMU Sans Serif" panose="02000603000000000000" pitchFamily="2" charset="0"/>
-                </a:rPr>
-                <a:t>Phänomene, die von Menschen</a:t>
-              </a:r>
-            </a:p>
-            <a:p>
-              <a:pPr algn="ctr">
-                <a:lnSpc>
-                  <a:spcPts val="2160"/>
-                </a:lnSpc>
-              </a:pPr>
-              <a:r>
-                <a:rPr lang="de-DE" sz="1700" dirty="0">
+                </a:endParaRPr>
+              </a:p>
+            </p:txBody>
+          </p:sp>
+        </mc:Choice>
+        <mc:Fallback>
+          <p:sp>
+            <p:nvSpPr>
+              <p:cNvPr id="16" name="TextBox 15">
+                <a:extLst>
+                  <a:ext uri="{FF2B5EF4-FFF2-40B4-BE49-F238E27FC236}">
+                    <a16:creationId xmlns:a16="http://schemas.microsoft.com/office/drawing/2014/main" id="{ECFAEFDA-1490-4232-9697-373920959759}"/>
+                  </a:ext>
+                </a:extLst>
+              </p:cNvPr>
+              <p:cNvSpPr txBox="1">
+                <a:spLocks noRot="1" noChangeAspect="1" noMove="1" noResize="1" noEditPoints="1" noAdjustHandles="1" noChangeArrowheads="1" noChangeShapeType="1" noTextEdit="1"/>
+              </p:cNvSpPr>
+              <p:nvPr/>
+            </p:nvSpPr>
+            <p:spPr>
+              <a:xfrm>
+                <a:off x="5183422" y="2830730"/>
+                <a:ext cx="1875257" cy="338554"/>
+              </a:xfrm>
+              <a:prstGeom prst="rect">
+                <a:avLst/>
+              </a:prstGeom>
+              <a:blipFill>
+                <a:blip r:embed="rId3"/>
+                <a:stretch>
+                  <a:fillRect b="-8929"/>
+                </a:stretch>
+              </a:blipFill>
+            </p:spPr>
+            <p:txBody>
+              <a:bodyPr/>
+              <a:lstStyle/>
+              <a:p>
+                <a:r>
+                  <a:rPr lang="de-DE">
+                    <a:noFill/>
+                  </a:rPr>
+                  <a:t> </a:t>
+                </a:r>
+              </a:p>
+            </p:txBody>
+          </p:sp>
+        </mc:Fallback>
+      </mc:AlternateContent>
+      <mc:AlternateContent xmlns:mc="http://schemas.openxmlformats.org/markup-compatibility/2006">
+        <mc:Choice xmlns:a14="http://schemas.microsoft.com/office/drawing/2010/main" Requires="a14">
+          <p:sp>
+            <p:nvSpPr>
+              <p:cNvPr id="17" name="TextBox 16">
+                <a:extLst>
+                  <a:ext uri="{FF2B5EF4-FFF2-40B4-BE49-F238E27FC236}">
+                    <a16:creationId xmlns:a16="http://schemas.microsoft.com/office/drawing/2014/main" id="{06A93C44-D71F-4A32-926F-C18F1F158287}"/>
+                  </a:ext>
+                </a:extLst>
+              </p:cNvPr>
+              <p:cNvSpPr txBox="1"/>
+              <p:nvPr/>
+            </p:nvSpPr>
+            <p:spPr>
+              <a:xfrm>
+                <a:off x="5155594" y="3594947"/>
+                <a:ext cx="1930913" cy="364780"/>
+              </a:xfrm>
+              <a:prstGeom prst="rect">
+                <a:avLst/>
+              </a:prstGeom>
+              <a:noFill/>
+            </p:spPr>
+            <p:txBody>
+              <a:bodyPr wrap="none" rtlCol="0">
+                <a:spAutoFit/>
+              </a:bodyPr>
+              <a:lstStyle/>
+              <a:p>
+                <a:pPr algn="ctr"/>
+                <a14:m>
+                  <m:oMathPara xmlns:m="http://schemas.openxmlformats.org/officeDocument/2006/math">
+                    <m:oMath>
+                      <m:sSub>
+                        <m:sSubPr>
+                          <m:ctrlPr>
+                            <a:rPr lang="de-DE" sz="1600" i="1">
+                              <a:solidFill>
+                                <a:schemeClr val="bg1">
+                                  <a:lumMod val="50000"/>
+                                </a:schemeClr>
+                              </a:solidFill>
+                              <a:latin typeface="Cambria Math" panose="02040503050406030204" pitchFamily="18" charset="0"/>
+                            </a:rPr>
+                          </m:ctrlPr>
+                        </m:sSubPr>
+                        <m:e>
+                          <m:r>
+                            <a:rPr lang="de-DE" sz="1600" i="1">
+                              <a:solidFill>
+                                <a:schemeClr val="bg1">
+                                  <a:lumMod val="50000"/>
+                                </a:schemeClr>
+                              </a:solidFill>
+                              <a:latin typeface="Cambria Math" panose="02040503050406030204" pitchFamily="18" charset="0"/>
+                            </a:rPr>
+                            <m:t>ℙ</m:t>
+                          </m:r>
+                        </m:e>
+                        <m:sub>
+                          <m:r>
+                            <a:rPr lang="de-DE" sz="1600" i="1">
+                              <a:solidFill>
+                                <a:schemeClr val="bg1">
+                                  <a:lumMod val="50000"/>
+                                </a:schemeClr>
+                              </a:solidFill>
+                              <a:latin typeface="Cambria Math" panose="02040503050406030204" pitchFamily="18" charset="0"/>
+                            </a:rPr>
+                            <m:t>𝜉</m:t>
+                          </m:r>
+                        </m:sub>
+                      </m:sSub>
+                      <m:d>
+                        <m:dPr>
+                          <m:ctrlPr>
+                            <a:rPr lang="de-DE" sz="1600" i="1">
+                              <a:solidFill>
+                                <a:schemeClr val="bg1">
+                                  <a:lumMod val="50000"/>
+                                </a:schemeClr>
+                              </a:solidFill>
+                              <a:latin typeface="Cambria Math" panose="02040503050406030204" pitchFamily="18" charset="0"/>
+                            </a:rPr>
+                          </m:ctrlPr>
+                        </m:dPr>
+                        <m:e>
+                          <m:r>
+                            <a:rPr lang="de-DE" sz="1600" i="1">
+                              <a:solidFill>
+                                <a:schemeClr val="bg1">
+                                  <a:lumMod val="50000"/>
+                                </a:schemeClr>
+                              </a:solidFill>
+                              <a:latin typeface="Cambria Math" panose="02040503050406030204" pitchFamily="18" charset="0"/>
+                            </a:rPr>
+                            <m:t>𝑆</m:t>
+                          </m:r>
+                        </m:e>
+                      </m:d>
+                      <m:r>
+                        <a:rPr lang="de-DE" sz="1600" i="1">
+                          <a:solidFill>
+                            <a:schemeClr val="bg1">
+                              <a:lumMod val="50000"/>
+                            </a:schemeClr>
+                          </a:solidFill>
+                          <a:latin typeface="Cambria Math" panose="02040503050406030204" pitchFamily="18" charset="0"/>
+                        </a:rPr>
+                        <m:t>=</m:t>
+                      </m:r>
+                      <m:r>
+                        <a:rPr lang="de-DE" sz="1600" i="1">
+                          <a:solidFill>
+                            <a:schemeClr val="bg1">
+                              <a:lumMod val="50000"/>
+                            </a:schemeClr>
+                          </a:solidFill>
+                          <a:latin typeface="Cambria Math" panose="02040503050406030204" pitchFamily="18" charset="0"/>
+                        </a:rPr>
+                        <m:t>ℙ</m:t>
+                      </m:r>
+                      <m:r>
+                        <a:rPr lang="de-DE" sz="1600" i="1">
+                          <a:solidFill>
+                            <a:schemeClr val="bg1">
+                              <a:lumMod val="50000"/>
+                            </a:schemeClr>
+                          </a:solidFill>
+                          <a:latin typeface="Cambria Math" panose="02040503050406030204" pitchFamily="18" charset="0"/>
+                        </a:rPr>
+                        <m:t>(</m:t>
+                      </m:r>
+                      <m:sSup>
+                        <m:sSupPr>
+                          <m:ctrlPr>
+                            <a:rPr lang="de-DE" sz="1600" i="1">
+                              <a:solidFill>
+                                <a:schemeClr val="bg1">
+                                  <a:lumMod val="50000"/>
+                                </a:schemeClr>
+                              </a:solidFill>
+                              <a:latin typeface="Cambria Math" panose="02040503050406030204" pitchFamily="18" charset="0"/>
+                            </a:rPr>
+                          </m:ctrlPr>
+                        </m:sSupPr>
+                        <m:e>
+                          <m:r>
+                            <a:rPr lang="de-DE" sz="1600" i="1">
+                              <a:solidFill>
+                                <a:schemeClr val="bg1">
+                                  <a:lumMod val="50000"/>
+                                </a:schemeClr>
+                              </a:solidFill>
+                              <a:latin typeface="Cambria Math" panose="02040503050406030204" pitchFamily="18" charset="0"/>
+                            </a:rPr>
+                            <m:t>𝜉</m:t>
+                          </m:r>
+                        </m:e>
+                        <m:sup>
+                          <m:r>
+                            <a:rPr lang="de-DE" sz="1600" i="1">
+                              <a:solidFill>
+                                <a:schemeClr val="bg1">
+                                  <a:lumMod val="50000"/>
+                                </a:schemeClr>
+                              </a:solidFill>
+                              <a:latin typeface="Cambria Math" panose="02040503050406030204" pitchFamily="18" charset="0"/>
+                            </a:rPr>
+                            <m:t>−1</m:t>
+                          </m:r>
+                        </m:sup>
+                      </m:sSup>
+                      <m:r>
+                        <a:rPr lang="de-DE" sz="1600" i="1">
+                          <a:solidFill>
+                            <a:schemeClr val="bg1">
+                              <a:lumMod val="50000"/>
+                            </a:schemeClr>
+                          </a:solidFill>
+                          <a:latin typeface="Cambria Math" panose="02040503050406030204" pitchFamily="18" charset="0"/>
+                        </a:rPr>
+                        <m:t>(</m:t>
+                      </m:r>
+                      <m:r>
+                        <a:rPr lang="de-DE" sz="1600" i="1">
+                          <a:solidFill>
+                            <a:schemeClr val="bg1">
+                              <a:lumMod val="50000"/>
+                            </a:schemeClr>
+                          </a:solidFill>
+                          <a:latin typeface="Cambria Math" panose="02040503050406030204" pitchFamily="18" charset="0"/>
+                        </a:rPr>
+                        <m:t>𝑆</m:t>
+                      </m:r>
+                      <m:r>
+                        <a:rPr lang="de-DE" sz="1600" i="1">
+                          <a:solidFill>
+                            <a:schemeClr val="bg1">
+                              <a:lumMod val="50000"/>
+                            </a:schemeClr>
+                          </a:solidFill>
+                          <a:latin typeface="Cambria Math" panose="02040503050406030204" pitchFamily="18" charset="0"/>
+                        </a:rPr>
+                        <m:t>))</m:t>
+                      </m:r>
+                    </m:oMath>
+                  </m:oMathPara>
+                </a14:m>
+                <a:endParaRPr lang="de-DE" sz="1600" dirty="0">
                   <a:solidFill>
                     <a:schemeClr val="bg1">
                       <a:lumMod val="50000"/>
                     </a:schemeClr>
                   </a:solidFill>
-                  <a:latin typeface="CMU Sans Serif" panose="02000603000000000000" pitchFamily="2" charset="0"/>
-                  <a:ea typeface="CMU Sans Serif" panose="02000603000000000000" pitchFamily="2" charset="0"/>
-                  <a:cs typeface="CMU Sans Serif" panose="02000603000000000000" pitchFamily="2" charset="0"/>
-                </a:rPr>
-                <a:t>nicht mit absoluter Sicherheit</a:t>
-              </a:r>
-            </a:p>
-            <a:p>
-              <a:pPr algn="ctr">
-                <a:lnSpc>
-                  <a:spcPts val="2160"/>
-                </a:lnSpc>
-              </a:pPr>
-              <a:r>
-                <a:rPr lang="de-DE" sz="1700" dirty="0">
-                  <a:solidFill>
-                    <a:schemeClr val="bg1">
-                      <a:lumMod val="50000"/>
-                    </a:schemeClr>
-                  </a:solidFill>
-                  <a:latin typeface="CMU Sans Serif" panose="02000603000000000000" pitchFamily="2" charset="0"/>
-                  <a:ea typeface="CMU Sans Serif" panose="02000603000000000000" pitchFamily="2" charset="0"/>
-                  <a:cs typeface="CMU Sans Serif" panose="02000603000000000000" pitchFamily="2" charset="0"/>
-                </a:rPr>
-                <a:t>vorhergesagt werden können.</a:t>
-              </a:r>
-              <a:endParaRPr lang="de-DE" sz="1700" dirty="0">
+                </a:endParaRPr>
+              </a:p>
+            </p:txBody>
+          </p:sp>
+        </mc:Choice>
+        <mc:Fallback>
+          <p:sp>
+            <p:nvSpPr>
+              <p:cNvPr id="17" name="TextBox 16">
+                <a:extLst>
+                  <a:ext uri="{FF2B5EF4-FFF2-40B4-BE49-F238E27FC236}">
+                    <a16:creationId xmlns:a16="http://schemas.microsoft.com/office/drawing/2014/main" id="{06A93C44-D71F-4A32-926F-C18F1F158287}"/>
+                  </a:ext>
+                </a:extLst>
+              </p:cNvPr>
+              <p:cNvSpPr txBox="1">
+                <a:spLocks noRot="1" noChangeAspect="1" noMove="1" noResize="1" noEditPoints="1" noAdjustHandles="1" noChangeArrowheads="1" noChangeShapeType="1" noTextEdit="1"/>
+              </p:cNvSpPr>
+              <p:nvPr/>
+            </p:nvSpPr>
+            <p:spPr>
+              <a:xfrm>
+                <a:off x="5155594" y="3594947"/>
+                <a:ext cx="1930913" cy="364780"/>
+              </a:xfrm>
+              <a:prstGeom prst="rect">
+                <a:avLst/>
+              </a:prstGeom>
+              <a:blipFill>
+                <a:blip r:embed="rId4"/>
+                <a:stretch>
+                  <a:fillRect b="-5000"/>
+                </a:stretch>
+              </a:blipFill>
+            </p:spPr>
+            <p:txBody>
+              <a:bodyPr/>
+              <a:lstStyle/>
+              <a:p>
+                <a:r>
+                  <a:rPr lang="de-DE">
+                    <a:noFill/>
+                  </a:rPr>
+                  <a:t> </a:t>
+                </a:r>
+              </a:p>
+            </p:txBody>
+          </p:sp>
+        </mc:Fallback>
+      </mc:AlternateContent>
+      <p:sp>
+        <p:nvSpPr>
+          <p:cNvPr id="18" name="TextBox 17">
+            <a:extLst>
+              <a:ext uri="{FF2B5EF4-FFF2-40B4-BE49-F238E27FC236}">
+                <a16:creationId xmlns:a16="http://schemas.microsoft.com/office/drawing/2014/main" id="{BE3FFAE8-CE9F-44C9-98F7-502EAAE534B7}"/>
+              </a:ext>
+            </a:extLst>
+          </p:cNvPr>
+          <p:cNvSpPr txBox="1"/>
+          <p:nvPr/>
+        </p:nvSpPr>
+        <p:spPr>
+          <a:xfrm>
+            <a:off x="2038262" y="279880"/>
+            <a:ext cx="3929281" cy="369332"/>
+          </a:xfrm>
+          <a:prstGeom prst="rect">
+            <a:avLst/>
+          </a:prstGeom>
+          <a:noFill/>
+        </p:spPr>
+        <p:txBody>
+          <a:bodyPr wrap="none" rtlCol="0">
+            <a:spAutoFit/>
+          </a:bodyPr>
+          <a:lstStyle/>
+          <a:p>
+            <a:r>
+              <a:rPr lang="de-DE" dirty="0">
+                <a:latin typeface="CMU Sans Serif" panose="02000603000000000000" pitchFamily="2" charset="0"/>
+                <a:ea typeface="CMU Sans Serif" panose="02000603000000000000" pitchFamily="2" charset="0"/>
+                <a:cs typeface="CMU Sans Serif" panose="02000603000000000000" pitchFamily="2" charset="0"/>
+              </a:rPr>
+              <a:t>Repräsentation zentraler Eigenschaften</a:t>
+            </a:r>
+          </a:p>
+        </p:txBody>
+      </p:sp>
+      <p:sp>
+        <p:nvSpPr>
+          <p:cNvPr id="19" name="TextBox 18">
+            <a:extLst>
+              <a:ext uri="{FF2B5EF4-FFF2-40B4-BE49-F238E27FC236}">
+                <a16:creationId xmlns:a16="http://schemas.microsoft.com/office/drawing/2014/main" id="{074E93DD-5B71-40FF-B9D4-3FC68E89DFF2}"/>
+              </a:ext>
+            </a:extLst>
+          </p:cNvPr>
+          <p:cNvSpPr txBox="1"/>
+          <p:nvPr/>
+        </p:nvSpPr>
+        <p:spPr>
+          <a:xfrm>
+            <a:off x="3292611" y="885725"/>
+            <a:ext cx="1420582" cy="369332"/>
+          </a:xfrm>
+          <a:prstGeom prst="rect">
+            <a:avLst/>
+          </a:prstGeom>
+          <a:noFill/>
+        </p:spPr>
+        <p:txBody>
+          <a:bodyPr wrap="none" rtlCol="0">
+            <a:spAutoFit/>
+          </a:bodyPr>
+          <a:lstStyle/>
+          <a:p>
+            <a:r>
+              <a:rPr lang="de-DE" dirty="0">
+                <a:latin typeface="CMU Sans Serif" panose="02000603000000000000" pitchFamily="2" charset="0"/>
+                <a:ea typeface="CMU Sans Serif" panose="02000603000000000000" pitchFamily="2" charset="0"/>
+                <a:cs typeface="CMU Sans Serif" panose="02000603000000000000" pitchFamily="2" charset="0"/>
+              </a:rPr>
+              <a:t>Modellierung</a:t>
+            </a:r>
+          </a:p>
+        </p:txBody>
+      </p:sp>
+      <p:sp>
+        <p:nvSpPr>
+          <p:cNvPr id="20" name="TextBox 19">
+            <a:extLst>
+              <a:ext uri="{FF2B5EF4-FFF2-40B4-BE49-F238E27FC236}">
+                <a16:creationId xmlns:a16="http://schemas.microsoft.com/office/drawing/2014/main" id="{2F69F9A2-AF6B-4647-9D4D-F1D8EFF90738}"/>
+              </a:ext>
+            </a:extLst>
+          </p:cNvPr>
+          <p:cNvSpPr txBox="1"/>
+          <p:nvPr/>
+        </p:nvSpPr>
+        <p:spPr>
+          <a:xfrm>
+            <a:off x="3319061" y="4589727"/>
+            <a:ext cx="1367682" cy="369332"/>
+          </a:xfrm>
+          <a:prstGeom prst="rect">
+            <a:avLst/>
+          </a:prstGeom>
+          <a:noFill/>
+        </p:spPr>
+        <p:txBody>
+          <a:bodyPr wrap="none" rtlCol="0">
+            <a:spAutoFit/>
+          </a:bodyPr>
+          <a:lstStyle/>
+          <a:p>
+            <a:r>
+              <a:rPr lang="de-DE" dirty="0">
+                <a:latin typeface="CMU Sans Serif" panose="02000603000000000000" pitchFamily="2" charset="0"/>
+                <a:ea typeface="CMU Sans Serif" panose="02000603000000000000" pitchFamily="2" charset="0"/>
+                <a:cs typeface="CMU Sans Serif" panose="02000603000000000000" pitchFamily="2" charset="0"/>
+              </a:rPr>
+              <a:t>Vorhersagen</a:t>
+            </a:r>
+          </a:p>
+        </p:txBody>
+      </p:sp>
+      <p:sp>
+        <p:nvSpPr>
+          <p:cNvPr id="21" name="TextBox 20">
+            <a:extLst>
+              <a:ext uri="{FF2B5EF4-FFF2-40B4-BE49-F238E27FC236}">
+                <a16:creationId xmlns:a16="http://schemas.microsoft.com/office/drawing/2014/main" id="{B5B26F24-F1ED-43CF-AA2A-FAA82841D015}"/>
+              </a:ext>
+            </a:extLst>
+          </p:cNvPr>
+          <p:cNvSpPr txBox="1"/>
+          <p:nvPr/>
+        </p:nvSpPr>
+        <p:spPr>
+          <a:xfrm>
+            <a:off x="2338023" y="5266849"/>
+            <a:ext cx="3329758" cy="369332"/>
+          </a:xfrm>
+          <a:prstGeom prst="rect">
+            <a:avLst/>
+          </a:prstGeom>
+          <a:noFill/>
+        </p:spPr>
+        <p:txBody>
+          <a:bodyPr wrap="none" rtlCol="0">
+            <a:spAutoFit/>
+          </a:bodyPr>
+          <a:lstStyle/>
+          <a:p>
+            <a:r>
+              <a:rPr lang="de-DE" dirty="0">
+                <a:latin typeface="CMU Sans Serif" panose="02000603000000000000" pitchFamily="2" charset="0"/>
+                <a:ea typeface="CMU Sans Serif" panose="02000603000000000000" pitchFamily="2" charset="0"/>
+                <a:cs typeface="CMU Sans Serif" panose="02000603000000000000" pitchFamily="2" charset="0"/>
+              </a:rPr>
+              <a:t>Quantifizierung von Unsicherheit</a:t>
+            </a:r>
+          </a:p>
+        </p:txBody>
+      </p:sp>
+      <p:sp>
+        <p:nvSpPr>
+          <p:cNvPr id="9" name="TextBox 8">
+            <a:extLst>
+              <a:ext uri="{FF2B5EF4-FFF2-40B4-BE49-F238E27FC236}">
+                <a16:creationId xmlns:a16="http://schemas.microsoft.com/office/drawing/2014/main" id="{350C3C8A-6E76-491D-A5B0-066F6F5F67A9}"/>
+              </a:ext>
+            </a:extLst>
+          </p:cNvPr>
+          <p:cNvSpPr txBox="1"/>
+          <p:nvPr/>
+        </p:nvSpPr>
+        <p:spPr>
+          <a:xfrm>
+            <a:off x="5478086" y="1333465"/>
+            <a:ext cx="1285929" cy="553998"/>
+          </a:xfrm>
+          <a:prstGeom prst="rect">
+            <a:avLst/>
+          </a:prstGeom>
+          <a:noFill/>
+        </p:spPr>
+        <p:txBody>
+          <a:bodyPr wrap="none" rtlCol="0">
+            <a:spAutoFit/>
+          </a:bodyPr>
+          <a:lstStyle/>
+          <a:p>
+            <a:pPr algn="ctr"/>
+            <a:r>
+              <a:rPr lang="de-DE" sz="3000" dirty="0">
+                <a:latin typeface="CMU Sans Serif" panose="02000603000000000000" pitchFamily="2" charset="0"/>
+                <a:ea typeface="CMU Sans Serif" panose="02000603000000000000" pitchFamily="2" charset="0"/>
+                <a:cs typeface="CMU Sans Serif" panose="02000603000000000000" pitchFamily="2" charset="0"/>
+              </a:rPr>
+              <a:t>Modell</a:t>
+            </a:r>
+          </a:p>
+        </p:txBody>
+      </p:sp>
+      <p:grpSp>
+        <p:nvGrpSpPr>
+          <p:cNvPr id="44" name="Group 43">
+            <a:extLst>
+              <a:ext uri="{FF2B5EF4-FFF2-40B4-BE49-F238E27FC236}">
+                <a16:creationId xmlns:a16="http://schemas.microsoft.com/office/drawing/2014/main" id="{0B87DA3F-0A37-4972-8B84-AD3118DFAF8A}"/>
+              </a:ext>
+            </a:extLst>
+          </p:cNvPr>
+          <p:cNvGrpSpPr/>
+          <p:nvPr/>
+        </p:nvGrpSpPr>
+        <p:grpSpPr>
+          <a:xfrm>
+            <a:off x="701515" y="1852436"/>
+            <a:ext cx="2188022" cy="2435230"/>
+            <a:chOff x="5959540" y="2616031"/>
+            <a:chExt cx="2553083" cy="2841536"/>
+          </a:xfrm>
+        </p:grpSpPr>
+        <p:pic>
+          <p:nvPicPr>
+            <p:cNvPr id="23" name="Picture 22" descr="A picture containing remote, controller, indoor, game&#10;&#10;Description automatically generated">
+              <a:extLst>
+                <a:ext uri="{FF2B5EF4-FFF2-40B4-BE49-F238E27FC236}">
+                  <a16:creationId xmlns:a16="http://schemas.microsoft.com/office/drawing/2014/main" id="{4799A0FE-DBF3-44FC-B547-A1A8BF0954AF}"/>
+                </a:ext>
+              </a:extLst>
+            </p:cNvPr>
+            <p:cNvPicPr>
+              <a:picLocks noChangeAspect="1"/>
+            </p:cNvPicPr>
+            <p:nvPr/>
+          </p:nvPicPr>
+          <p:blipFill>
+            <a:blip r:embed="rId5">
+              <a:grayscl/>
+              <a:extLst>
+                <a:ext uri="{28A0092B-C50C-407E-A947-70E740481C1C}">
+                  <a14:useLocalDpi xmlns:a14="http://schemas.microsoft.com/office/drawing/2010/main" val="0"/>
+                </a:ext>
+              </a:extLst>
+            </a:blip>
+            <a:stretch>
+              <a:fillRect/>
+            </a:stretch>
+          </p:blipFill>
+          <p:spPr>
+            <a:xfrm>
+              <a:off x="6263373" y="2866929"/>
+              <a:ext cx="777344" cy="586024"/>
+            </a:xfrm>
+            <a:prstGeom prst="rect">
+              <a:avLst/>
+            </a:prstGeom>
+          </p:spPr>
+        </p:pic>
+        <p:pic>
+          <p:nvPicPr>
+            <p:cNvPr id="34" name="Picture 33" descr="A person working on a computer&#10;&#10;Description automatically generated with low confidence">
+              <a:extLst>
+                <a:ext uri="{FF2B5EF4-FFF2-40B4-BE49-F238E27FC236}">
+                  <a16:creationId xmlns:a16="http://schemas.microsoft.com/office/drawing/2014/main" id="{2DDB4FBC-E6FF-45DA-825C-E36189F7ABF2}"/>
+                </a:ext>
+              </a:extLst>
+            </p:cNvPr>
+            <p:cNvPicPr>
+              <a:picLocks noChangeAspect="1"/>
+            </p:cNvPicPr>
+            <p:nvPr/>
+          </p:nvPicPr>
+          <p:blipFill>
+            <a:blip r:embed="rId6">
+              <a:grayscl/>
+              <a:extLst>
+                <a:ext uri="{28A0092B-C50C-407E-A947-70E740481C1C}">
+                  <a14:useLocalDpi xmlns:a14="http://schemas.microsoft.com/office/drawing/2010/main" val="0"/>
+                </a:ext>
+              </a:extLst>
+            </a:blip>
+            <a:stretch>
+              <a:fillRect/>
+            </a:stretch>
+          </p:blipFill>
+          <p:spPr>
+            <a:xfrm>
+              <a:off x="5964503" y="3537055"/>
+              <a:ext cx="1231535" cy="684589"/>
+            </a:xfrm>
+            <a:prstGeom prst="rect">
+              <a:avLst/>
+            </a:prstGeom>
+          </p:spPr>
+        </p:pic>
+        <p:pic>
+          <p:nvPicPr>
+            <p:cNvPr id="37" name="Picture 36" descr="A close up of a roulette wheel&#10;&#10;Description automatically generated with medium confidence">
+              <a:extLst>
+                <a:ext uri="{FF2B5EF4-FFF2-40B4-BE49-F238E27FC236}">
+                  <a16:creationId xmlns:a16="http://schemas.microsoft.com/office/drawing/2014/main" id="{D7607054-71A3-46D2-9A07-46F468FE2002}"/>
+                </a:ext>
+              </a:extLst>
+            </p:cNvPr>
+            <p:cNvPicPr>
+              <a:picLocks noChangeAspect="1"/>
+            </p:cNvPicPr>
+            <p:nvPr/>
+          </p:nvPicPr>
+          <p:blipFill>
+            <a:blip r:embed="rId7">
+              <a:grayscl/>
+              <a:extLst>
+                <a:ext uri="{28A0092B-C50C-407E-A947-70E740481C1C}">
+                  <a14:useLocalDpi xmlns:a14="http://schemas.microsoft.com/office/drawing/2010/main" val="0"/>
+                </a:ext>
+              </a:extLst>
+            </a:blip>
+            <a:stretch>
+              <a:fillRect/>
+            </a:stretch>
+          </p:blipFill>
+          <p:spPr>
+            <a:xfrm>
+              <a:off x="7401873" y="3825064"/>
+              <a:ext cx="921192" cy="614128"/>
+            </a:xfrm>
+            <a:prstGeom prst="rect">
+              <a:avLst/>
+            </a:prstGeom>
+            <a:ln>
+              <a:noFill/>
+            </a:ln>
+            <a:effectLst>
+              <a:softEdge rad="112500"/>
+            </a:effectLst>
+          </p:spPr>
+        </p:pic>
+        <p:pic>
+          <p:nvPicPr>
+            <p:cNvPr id="39" name="Picture 38" descr="Text&#10;&#10;Description automatically generated with low confidence">
+              <a:extLst>
+                <a:ext uri="{FF2B5EF4-FFF2-40B4-BE49-F238E27FC236}">
+                  <a16:creationId xmlns:a16="http://schemas.microsoft.com/office/drawing/2014/main" id="{3B5CC7A7-FC1A-436E-B73A-54753402B87F}"/>
+                </a:ext>
+              </a:extLst>
+            </p:cNvPr>
+            <p:cNvPicPr>
+              <a:picLocks noChangeAspect="1"/>
+            </p:cNvPicPr>
+            <p:nvPr/>
+          </p:nvPicPr>
+          <p:blipFill>
+            <a:blip r:embed="rId8">
+              <a:grayscl/>
+              <a:extLst>
+                <a:ext uri="{28A0092B-C50C-407E-A947-70E740481C1C}">
+                  <a14:useLocalDpi xmlns:a14="http://schemas.microsoft.com/office/drawing/2010/main" val="0"/>
+                </a:ext>
+              </a:extLst>
+            </a:blip>
+            <a:stretch>
+              <a:fillRect/>
+            </a:stretch>
+          </p:blipFill>
+          <p:spPr>
+            <a:xfrm>
+              <a:off x="7620797" y="2616031"/>
+              <a:ext cx="842997" cy="1103965"/>
+            </a:xfrm>
+            <a:prstGeom prst="rect">
+              <a:avLst/>
+            </a:prstGeom>
+          </p:spPr>
+        </p:pic>
+        <p:pic>
+          <p:nvPicPr>
+            <p:cNvPr id="41" name="Picture 40" descr="A group of people sitting in chairs&#10;&#10;Description automatically generated with low confidence">
+              <a:extLst>
+                <a:ext uri="{FF2B5EF4-FFF2-40B4-BE49-F238E27FC236}">
+                  <a16:creationId xmlns:a16="http://schemas.microsoft.com/office/drawing/2014/main" id="{6B9CBA47-8A45-408D-8C24-7B1D73F535B0}"/>
+                </a:ext>
+              </a:extLst>
+            </p:cNvPr>
+            <p:cNvPicPr>
+              <a:picLocks noChangeAspect="1"/>
+            </p:cNvPicPr>
+            <p:nvPr/>
+          </p:nvPicPr>
+          <p:blipFill>
+            <a:blip r:embed="rId9">
+              <a:grayscl/>
+              <a:extLst>
+                <a:ext uri="{28A0092B-C50C-407E-A947-70E740481C1C}">
+                  <a14:useLocalDpi xmlns:a14="http://schemas.microsoft.com/office/drawing/2010/main" val="0"/>
+                </a:ext>
+              </a:extLst>
+            </a:blip>
+            <a:stretch>
+              <a:fillRect/>
+            </a:stretch>
+          </p:blipFill>
+          <p:spPr>
+            <a:xfrm>
+              <a:off x="5959540" y="4538998"/>
+              <a:ext cx="2553083" cy="918569"/>
+            </a:xfrm>
+            <a:prstGeom prst="rect">
+              <a:avLst/>
+            </a:prstGeom>
+          </p:spPr>
+        </p:pic>
+        <p:pic>
+          <p:nvPicPr>
+            <p:cNvPr id="26" name="Picture 25" descr="A picture containing logo&#10;&#10;Description automatically generated">
+              <a:extLst>
+                <a:ext uri="{FF2B5EF4-FFF2-40B4-BE49-F238E27FC236}">
+                  <a16:creationId xmlns:a16="http://schemas.microsoft.com/office/drawing/2014/main" id="{AD6370E4-D950-44DE-ACAE-5858E1218183}"/>
+                </a:ext>
+              </a:extLst>
+            </p:cNvPr>
+            <p:cNvPicPr>
+              <a:picLocks noChangeAspect="1"/>
+            </p:cNvPicPr>
+            <p:nvPr/>
+          </p:nvPicPr>
+          <p:blipFill>
+            <a:blip r:embed="rId10">
+              <a:grayscl/>
+              <a:extLst>
+                <a:ext uri="{28A0092B-C50C-407E-A947-70E740481C1C}">
+                  <a14:useLocalDpi xmlns:a14="http://schemas.microsoft.com/office/drawing/2010/main" val="0"/>
+                </a:ext>
+              </a:extLst>
+            </a:blip>
+            <a:stretch>
+              <a:fillRect/>
+            </a:stretch>
+          </p:blipFill>
+          <p:spPr>
+            <a:xfrm>
+              <a:off x="7149297" y="3123239"/>
+              <a:ext cx="516850" cy="516850"/>
+            </a:xfrm>
+            <a:prstGeom prst="rect">
+              <a:avLst/>
+            </a:prstGeom>
+          </p:spPr>
+        </p:pic>
+      </p:grpSp>
+      <p:sp>
+        <p:nvSpPr>
+          <p:cNvPr id="42" name="Rectangle 41">
+            <a:extLst>
+              <a:ext uri="{FF2B5EF4-FFF2-40B4-BE49-F238E27FC236}">
+                <a16:creationId xmlns:a16="http://schemas.microsoft.com/office/drawing/2014/main" id="{0232B15F-3167-4A3B-8ED0-7D7F53A40B37}"/>
+              </a:ext>
+            </a:extLst>
+          </p:cNvPr>
+          <p:cNvSpPr/>
+          <p:nvPr/>
+        </p:nvSpPr>
+        <p:spPr>
+          <a:xfrm>
+            <a:off x="436248" y="1852436"/>
+            <a:ext cx="2491217" cy="2594390"/>
+          </a:xfrm>
+          <a:prstGeom prst="rect">
+            <a:avLst/>
+          </a:prstGeom>
+          <a:solidFill>
+            <a:schemeClr val="bg1">
+              <a:alpha val="80000"/>
+            </a:schemeClr>
+          </a:solidFill>
+          <a:ln>
+            <a:solidFill>
+              <a:schemeClr val="bg1"/>
+            </a:solidFill>
+          </a:ln>
+        </p:spPr>
+        <p:style>
+          <a:lnRef idx="2">
+            <a:schemeClr val="accent1">
+              <a:shade val="50000"/>
+            </a:schemeClr>
+          </a:lnRef>
+          <a:fillRef idx="1">
+            <a:schemeClr val="accent1"/>
+          </a:fillRef>
+          <a:effectRef idx="0">
+            <a:schemeClr val="accent1"/>
+          </a:effectRef>
+          <a:fontRef idx="minor">
+            <a:schemeClr val="lt1"/>
+          </a:fontRef>
+        </p:style>
+        <p:txBody>
+          <a:bodyPr rtlCol="0" anchor="ctr"/>
+          <a:lstStyle/>
+          <a:p>
+            <a:pPr algn="ctr"/>
+            <a:endParaRPr lang="de-DE" dirty="0"/>
+          </a:p>
+        </p:txBody>
+      </p:sp>
+      <p:sp>
+        <p:nvSpPr>
+          <p:cNvPr id="25" name="TextBox 24">
+            <a:extLst>
+              <a:ext uri="{FF2B5EF4-FFF2-40B4-BE49-F238E27FC236}">
+                <a16:creationId xmlns:a16="http://schemas.microsoft.com/office/drawing/2014/main" id="{A326C4DA-8239-4EDD-8E73-20E880E6E7F2}"/>
+              </a:ext>
+            </a:extLst>
+          </p:cNvPr>
+          <p:cNvSpPr txBox="1"/>
+          <p:nvPr/>
+        </p:nvSpPr>
+        <p:spPr>
+          <a:xfrm>
+            <a:off x="810102" y="2067459"/>
+            <a:ext cx="1686679" cy="374461"/>
+          </a:xfrm>
+          <a:prstGeom prst="rect">
+            <a:avLst/>
+          </a:prstGeom>
+          <a:noFill/>
+        </p:spPr>
+        <p:txBody>
+          <a:bodyPr wrap="none" rtlCol="0">
+            <a:spAutoFit/>
+          </a:bodyPr>
+          <a:lstStyle/>
+          <a:p>
+            <a:pPr algn="ctr">
+              <a:lnSpc>
+                <a:spcPts val="2160"/>
+              </a:lnSpc>
+            </a:pPr>
+            <a:r>
+              <a:rPr lang="de-DE" dirty="0">
+                <a:latin typeface="CMU Sans Serif" panose="02000603000000000000" pitchFamily="2" charset="0"/>
+                <a:ea typeface="CMU Sans Serif" panose="02000603000000000000" pitchFamily="2" charset="0"/>
+                <a:cs typeface="CMU Sans Serif" panose="02000603000000000000" pitchFamily="2" charset="0"/>
+              </a:rPr>
+              <a:t>Zufallsvorgänge</a:t>
+            </a:r>
+            <a:endParaRPr lang="de-DE" sz="1600" dirty="0">
+              <a:solidFill>
+                <a:srgbClr val="0070C0"/>
+              </a:solidFill>
+              <a:latin typeface="CMU Sans Serif" panose="02000603000000000000" pitchFamily="2" charset="0"/>
+              <a:ea typeface="CMU Sans Serif" panose="02000603000000000000" pitchFamily="2" charset="0"/>
+              <a:cs typeface="CMU Sans Serif" panose="02000603000000000000" pitchFamily="2" charset="0"/>
+            </a:endParaRPr>
+          </a:p>
+        </p:txBody>
+      </p:sp>
+      <p:sp>
+        <p:nvSpPr>
+          <p:cNvPr id="43" name="TextBox 42">
+            <a:extLst>
+              <a:ext uri="{FF2B5EF4-FFF2-40B4-BE49-F238E27FC236}">
+                <a16:creationId xmlns:a16="http://schemas.microsoft.com/office/drawing/2014/main" id="{D48C25C5-3AE9-4AA2-A1DA-E7AE1D5D9094}"/>
+              </a:ext>
+            </a:extLst>
+          </p:cNvPr>
+          <p:cNvSpPr txBox="1"/>
+          <p:nvPr/>
+        </p:nvSpPr>
+        <p:spPr>
+          <a:xfrm>
+            <a:off x="153672" y="2584937"/>
+            <a:ext cx="2999539" cy="938719"/>
+          </a:xfrm>
+          <a:prstGeom prst="rect">
+            <a:avLst/>
+          </a:prstGeom>
+          <a:noFill/>
+        </p:spPr>
+        <p:txBody>
+          <a:bodyPr wrap="none" rtlCol="0">
+            <a:spAutoFit/>
+          </a:bodyPr>
+          <a:lstStyle/>
+          <a:p>
+            <a:pPr algn="ctr">
+              <a:lnSpc>
+                <a:spcPts val="2160"/>
+              </a:lnSpc>
+            </a:pPr>
+            <a:r>
+              <a:rPr lang="de-DE" sz="1700" dirty="0">
                 <a:solidFill>
                   <a:schemeClr val="bg1">
                     <a:lumMod val="50000"/>
                   </a:schemeClr>
                 </a:solidFill>
-              </a:endParaRPr>
-            </a:p>
-          </p:txBody>
-        </p:sp>
-      </p:grpSp>
+                <a:latin typeface="CMU Sans Serif" panose="02000603000000000000" pitchFamily="2" charset="0"/>
+                <a:ea typeface="CMU Sans Serif" panose="02000603000000000000" pitchFamily="2" charset="0"/>
+                <a:cs typeface="CMU Sans Serif" panose="02000603000000000000" pitchFamily="2" charset="0"/>
+              </a:rPr>
+              <a:t>Phänomene, die von Menschen</a:t>
+            </a:r>
+          </a:p>
+          <a:p>
+            <a:pPr algn="ctr">
+              <a:lnSpc>
+                <a:spcPts val="2160"/>
+              </a:lnSpc>
+            </a:pPr>
+            <a:r>
+              <a:rPr lang="de-DE" sz="1700" dirty="0">
+                <a:solidFill>
+                  <a:schemeClr val="bg1">
+                    <a:lumMod val="50000"/>
+                  </a:schemeClr>
+                </a:solidFill>
+                <a:latin typeface="CMU Sans Serif" panose="02000603000000000000" pitchFamily="2" charset="0"/>
+                <a:ea typeface="CMU Sans Serif" panose="02000603000000000000" pitchFamily="2" charset="0"/>
+                <a:cs typeface="CMU Sans Serif" panose="02000603000000000000" pitchFamily="2" charset="0"/>
+              </a:rPr>
+              <a:t>nicht mit absoluter Sicherheit</a:t>
+            </a:r>
+          </a:p>
+          <a:p>
+            <a:pPr algn="ctr">
+              <a:lnSpc>
+                <a:spcPts val="2160"/>
+              </a:lnSpc>
+            </a:pPr>
+            <a:r>
+              <a:rPr lang="de-DE" sz="1700" dirty="0">
+                <a:solidFill>
+                  <a:schemeClr val="bg1">
+                    <a:lumMod val="50000"/>
+                  </a:schemeClr>
+                </a:solidFill>
+                <a:latin typeface="CMU Sans Serif" panose="02000603000000000000" pitchFamily="2" charset="0"/>
+                <a:ea typeface="CMU Sans Serif" panose="02000603000000000000" pitchFamily="2" charset="0"/>
+                <a:cs typeface="CMU Sans Serif" panose="02000603000000000000" pitchFamily="2" charset="0"/>
+              </a:rPr>
+              <a:t>vorhergesagt werden können.</a:t>
+            </a:r>
+            <a:endParaRPr lang="de-DE" sz="1700" dirty="0">
+              <a:solidFill>
+                <a:schemeClr val="bg1">
+                  <a:lumMod val="50000"/>
+                </a:schemeClr>
+              </a:solidFill>
+            </a:endParaRPr>
+          </a:p>
+        </p:txBody>
+      </p:sp>
     </p:spTree>
     <p:extLst>
       <p:ext uri="{BB962C8B-B14F-4D97-AF65-F5344CB8AC3E}">
